--- a/it/slides/22-Architettura_dei_Calcolatori-Verm1_Parte_4-Codice.pptx
+++ b/it/slides/22-Architettura_dei_Calcolatori-Verm1_Parte_4-Codice.pptx
@@ -150,22 +150,34 @@
   <p:extLst>
     <p:ext uri="{521415D9-36F7-43E2-AB2F-B90AF26B5E84}">
       <p14:sectionLst xmlns:p14="http://schemas.microsoft.com/office/powerpoint/2010/main">
-        <p14:section name="Apertura" id="{ad61114e-3278-0aa4-de5c-54e007b6b942}">
+        <p14:section name="Apertura" id="{5e0be243-adb9-6994-2623-00f3275022c1}">
           <p14:sldIdLst>
             <p14:sldId id="256"/>
             <p14:sldId id="257"/>
           </p14:sldIdLst>
         </p14:section>
-        <p14:section name="I listati" id="{2bbd55a2-1b5e-15a6-4aad-744b018312f1}">
+        <p14:section name="I listati" id="{7bc13797-3cf4-d5b8-4b19-77b44b5558cb}">
           <p14:sldIdLst>
             <p14:sldId id="258"/>
+          </p14:sldIdLst>
+        </p14:section>
+        <p14:section name="Passo 1: il punteggio in cifre" id="{8f4738a4-ab1f-c4e8-8d4e-d83877d9ba76}">
+          <p14:sldIdLst>
             <p14:sldId id="259"/>
             <p14:sldId id="260"/>
             <p14:sldId id="261"/>
             <p14:sldId id="262"/>
+          </p14:sldIdLst>
+        </p14:section>
+        <p14:section name="Passo 2: i livelli" id="{1496cfd3-64e2-6907-f191-d5b1b4863ae2}">
+          <p14:sldIdLst>
             <p14:sldId id="263"/>
             <p14:sldId id="264"/>
             <p14:sldId id="265"/>
+          </p14:sldIdLst>
+        </p14:section>
+        <p14:section name="Passo 3: step dice che cosa ha cambiato" id="{ae009616-b530-2de0-42fd-f75c075c4812}">
+          <p14:sldIdLst>
             <p14:sldId id="266"/>
             <p14:sldId id="267"/>
             <p14:sldId id="268"/>
@@ -174,6 +186,10 @@
             <p14:sldId id="271"/>
             <p14:sldId id="272"/>
             <p14:sldId id="273"/>
+          </p14:sldIdLst>
+        </p14:section>
+        <p14:section name="Passo 4: disegnare solo ciò che è cambiato" id="{992cad96-9cfd-2034-3701-dc515d71c2a9}">
+          <p14:sldIdLst>
             <p14:sldId id="274"/>
             <p14:sldId id="275"/>
             <p14:sldId id="276"/>
@@ -185,6 +201,10 @@
             <p14:sldId id="282"/>
             <p14:sldId id="283"/>
             <p14:sldId id="284"/>
+          </p14:sldIdLst>
+        </p14:section>
+        <p14:section name="Passo 5: misurare" id="{a2acdc1b-faa0-56f2-f88e-3301ac893cd3}">
+          <p14:sldIdLst>
             <p14:sldId id="285"/>
             <p14:sldId id="286"/>
             <p14:sldId id="287"/>
@@ -196,7 +216,7 @@
             <p14:sldId id="293"/>
           </p14:sldIdLst>
         </p14:section>
-        <p14:section name="Eseguire e provare" id="{a4089a7f-8851-bd09-60d7-a303d76315b8}">
+        <p14:section name="Eseguire e provare" id="{13011c22-b1a4-2319-9963-1e8d4cd7b599}">
           <p14:sldIdLst>
             <p14:sldId id="294"/>
             <p14:sldId id="295"/>
@@ -205,7 +225,7 @@
             <p14:sldId id="298"/>
           </p14:sldIdLst>
         </p14:section>
-        <p14:section name="Esercizi" id="{73e31969-f5bf-45f4-3f03-12c0b2bb5938}">
+        <p14:section name="Esercizi" id="{a46f2088-f089-da13-1f0c-438f4f9b41c9}">
           <p14:sldIdLst>
             <p14:sldId id="299"/>
           </p14:sldIdLst>
@@ -5445,7 +5465,63 @@
       </p:sp>
       <p:sp>
         <p:nvSpPr>
-          <p:cNvPr id="12" name="Shape 10"/>
+          <p:cNvPr id="12" name="Text 10"/>
+          <p:cNvSpPr txBox="1"/>
+          <p:nvPr/>
+        </p:nvSpPr>
+        <p:spPr>
+          <a:xfrm>
+            <a:off x="4693615" y="566928"/>
+            <a:ext cx="6949440" cy="640080"/>
+          </a:xfrm>
+          <a:prstGeom prst="rect">
+            <a:avLst/>
+          </a:prstGeom>
+          <a:noFill/>
+          <a:ln/>
+        </p:spPr>
+        <p:txBody>
+          <a:bodyPr wrap="square" lIns="0" tIns="0" rIns="0" bIns="0" rtlCol="0" anchor="t"/>
+          <a:lstStyle/>
+          <a:p>
+            <a:pPr algn="r" indent="0" marL="0">
+              <a:buNone/>
+            </a:pPr>
+            <a:r>
+              <a:rPr lang="en-US" sz="1300" dirty="0">
+                <a:solidFill>
+                  <a:srgbClr val="CFE3EA"/>
+                </a:solidFill>
+                <a:latin typeface="Calibri" pitchFamily="34" charset="0"/>
+                <a:ea typeface="Calibri" pitchFamily="34" charset="-122"/>
+                <a:cs typeface="Calibri" pitchFamily="34" charset="-120"/>
+              </a:rPr>
+              <a:t>Presentazione del codice. I concetti, le figure e le domande sono nella presentazione della lezione:</a:t>
+            </a:r>
+            <a:endParaRPr lang="en-US" sz="1300" dirty="0"/>
+          </a:p>
+          <a:p>
+            <a:pPr algn="r" indent="0" marL="0">
+              <a:buNone/>
+            </a:pPr>
+            <a:r>
+              <a:rPr lang="en-US" sz="1300" dirty="0">
+                <a:solidFill>
+                  <a:srgbClr val="CFE3EA"/>
+                </a:solidFill>
+                <a:latin typeface="Calibri" pitchFamily="34" charset="0"/>
+                <a:ea typeface="Calibri" pitchFamily="34" charset="-122"/>
+                <a:cs typeface="Calibri" pitchFamily="34" charset="-120"/>
+              </a:rPr>
+              <a:t>22-Architettura_dei_Calcolatori-Verm1_Parte_4.pptx</a:t>
+            </a:r>
+            <a:endParaRPr lang="en-US" sz="1300" dirty="0"/>
+          </a:p>
+        </p:txBody>
+      </p:sp>
+      <p:sp>
+        <p:nvSpPr>
+          <p:cNvPr id="13" name="Shape 11"/>
           <p:cNvSpPr/>
           <p:nvPr/>
         </p:nvSpPr>
@@ -5472,7 +5548,7 @@
       </p:sp>
       <p:pic>
         <p:nvPicPr>
-          <p:cNvPr id="13" name="Image 0" descr="/Users/raffaelemontella/devel/riscv-prg32/computer-architecture-with-prg32/tools/assets/verm1_p4_play.png">    </p:cNvPr>
+          <p:cNvPr id="14" name="Image 0" descr="/Users/raffaelemontella/devel/riscv-prg32/computer-architecture-with-prg32/tools/assets/verm1_p4_play.png">    </p:cNvPr>
           <p:cNvPicPr>
             <a:picLocks noChangeAspect="1"/>
           </p:cNvPicPr>

--- a/it/slides/22-Architettura_dei_Calcolatori-Verm1_Parte_4-Codice.pptx
+++ b/it/slides/22-Architettura_dei_Calcolatori-Verm1_Parte_4-Codice.pptx
@@ -150,18 +150,18 @@
   <p:extLst>
     <p:ext uri="{521415D9-36F7-43E2-AB2F-B90AF26B5E84}">
       <p14:sectionLst xmlns:p14="http://schemas.microsoft.com/office/powerpoint/2010/main">
-        <p14:section name="Apertura" id="{5e0be243-adb9-6994-2623-00f3275022c1}">
+        <p14:section name="Apertura" id="{e257501e-6bcd-447c-f753-57e7e6e27fb5}">
           <p14:sldIdLst>
             <p14:sldId id="256"/>
             <p14:sldId id="257"/>
           </p14:sldIdLst>
         </p14:section>
-        <p14:section name="I listati" id="{7bc13797-3cf4-d5b8-4b19-77b44b5558cb}">
+        <p14:section name="I listati" id="{14e51238-341b-98d6-f97c-0ffe11f0f055}">
           <p14:sldIdLst>
             <p14:sldId id="258"/>
           </p14:sldIdLst>
         </p14:section>
-        <p14:section name="Passo 1: il punteggio in cifre" id="{8f4738a4-ab1f-c4e8-8d4e-d83877d9ba76}">
+        <p14:section name="Passo 1: il punteggio in cifre" id="{3f57570e-1570-1954-93d8-598b806ebb0b}">
           <p14:sldIdLst>
             <p14:sldId id="259"/>
             <p14:sldId id="260"/>
@@ -169,14 +169,14 @@
             <p14:sldId id="262"/>
           </p14:sldIdLst>
         </p14:section>
-        <p14:section name="Passo 2: i livelli" id="{1496cfd3-64e2-6907-f191-d5b1b4863ae2}">
+        <p14:section name="Passo 2: i livelli" id="{bbd4accc-ac24-6088-577d-192d2e4e85f4}">
           <p14:sldIdLst>
             <p14:sldId id="263"/>
             <p14:sldId id="264"/>
             <p14:sldId id="265"/>
           </p14:sldIdLst>
         </p14:section>
-        <p14:section name="Passo 3: step dice che cosa ha cambiato" id="{ae009616-b530-2de0-42fd-f75c075c4812}">
+        <p14:section name="Passo 3: step dice che cosa ha cambiato" id="{e06a041e-9acb-e4bc-104f-a055d5a4106f}">
           <p14:sldIdLst>
             <p14:sldId id="266"/>
             <p14:sldId id="267"/>
@@ -188,7 +188,7 @@
             <p14:sldId id="273"/>
           </p14:sldIdLst>
         </p14:section>
-        <p14:section name="Passo 4: disegnare solo ciò che è cambiato" id="{992cad96-9cfd-2034-3701-dc515d71c2a9}">
+        <p14:section name="Passo 4: disegnare solo ciò che è cambiato" id="{c7c207cd-6c1a-d67f-db37-2412d3f007ee}">
           <p14:sldIdLst>
             <p14:sldId id="274"/>
             <p14:sldId id="275"/>
@@ -203,7 +203,7 @@
             <p14:sldId id="284"/>
           </p14:sldIdLst>
         </p14:section>
-        <p14:section name="Passo 5: misurare" id="{a2acdc1b-faa0-56f2-f88e-3301ac893cd3}">
+        <p14:section name="Passo 5: misurare" id="{dca8dc34-afdf-216e-7720-5ff53a3689c1}">
           <p14:sldIdLst>
             <p14:sldId id="285"/>
             <p14:sldId id="286"/>
@@ -216,7 +216,7 @@
             <p14:sldId id="293"/>
           </p14:sldIdLst>
         </p14:section>
-        <p14:section name="Eseguire e provare" id="{13011c22-b1a4-2319-9963-1e8d4cd7b599}">
+        <p14:section name="Eseguire e provare" id="{291b7b1c-6654-1146-39dd-9d086bcecfab}">
           <p14:sldIdLst>
             <p14:sldId id="294"/>
             <p14:sldId id="295"/>
@@ -225,7 +225,7 @@
             <p14:sldId id="298"/>
           </p14:sldIdLst>
         </p14:section>
-        <p14:section name="Esercizi" id="{a46f2088-f089-da13-1f0c-438f4f9b41c9}">
+        <p14:section name="Esercizi" id="{ff36453c-7b2e-b94c-49f0-00d89d6b0c91}">
           <p14:sldIdLst>
             <p14:sldId id="299"/>
           </p14:sldIdLst>
@@ -634,7 +634,9 @@
           <a:p>
             <a:r>
               <a:rPr lang="en-US" dirty="0"/>
-              <a:t>Questa è la presentazione del codice della Lezione 22. La presentazione della lezione contiene i concetti; questa contiene tutto ciò che si scrive e si esegue: i listati con la loro spiegazione, il programma completo, che cosa mostra, e il modo di provarlo su ciascuno dei tre host.</a:t>
+              <a:t>Questa è la presentazione del codice della Lezione 22. La presentazione della lezione contiene i concetti; questa contiene tutto ciò che si scrive e si esegue: i listati con la loro spiegazione, il programma completo, che cosa mostra, e il modo di provarlo su ciascuno dei tre host.
+Stato di apprendimento: DA COMPRENDERE OGGI, alla fine di questa lezione lo spiegate, lo seguite passo passo e lo applicate da soli; DA UTILIZZARE OGGI, oggi seguite e usate la ricetta; come funziona dentro si spiega più avanti, o non fa parte del corso; DA COMPRENDERE PIÙ AVANTI, riconoscete il nome e lo scopo; lo spiega una lezione successiva. Una slide senza etichetta è contesto: una storia, un esempio, una domanda, un esercizio.
+Stato di apprendimento di questa lezione. DA COMPRENDERE OGGI: quoziente e resto; caratteri e stringhe; la virgola fissa; la convenzione di chiamata; gli array in memoria; macchine a stati finiti; il frame buffer; il ciclo del processore. DA UTILIZZARE OGGI: gli strumenti di PRG32, il debugger di PRG32-QT (si usa, non si studia, in questo corso). DA COMPRENDERE PIÙ AVANTI: niente. Una slide senza etichetta è contesto: una storia, un esempio, una domanda, un esercizio.</a:t>
             </a:r>
             <a:endParaRPr lang="en-US" dirty="0"/>
           </a:p>
@@ -812,6 +814,7 @@
             <a:r>
               <a:rPr lang="en-US" dirty="0"/>
               <a:t>play_note sostituisce eat_sound. Il chiamante sceglie la nota e la durata, in a2 e a4; la funzione compila canale, strumento e volume e chiama prg32_audio_note. Notate la scelta dei registri: nota e durata sono già dove le aspetta la funzione del runtime, quindi non c'è nulla da spostare. Un contratto progettato attorno al chiamato risparmia istruzioni.
+DA COMPRENDERE OGGI: la convenzione di chiamata.
 Per il docente: Gli argomenti restano nei registri in cui prg32_audio_note li aspetta: a2 è la nota e a4 la durata in entrambe le funzioni. Progettare un contratto attorno al chiamato risparmia spostamenti.</a:t>
             </a:r>
             <a:endParaRPr lang="en-US" dirty="0"/>
@@ -901,6 +904,7 @@
             <a:r>
               <a:rPr lang="en-US" dirty="0"/>
               <a:t>L'inizio di step, con due store in più: prima che la testa si muova, le sue coordinate vengono scritte in old_x e old_y. Quella cella sta per smettere di essere testa e diventare corpo, e draw dovrà ridipingerla.
+DA COMPRENDERE OGGI: gli array in memoria.
 Per il docente: Al codice della Parte 3 si aggiungono due store: le righe che scrivono old_x e old_y.</a:t>
             </a:r>
             <a:endParaRPr lang="en-US" dirty="0"/>
@@ -990,6 +994,7 @@
             <a:r>
               <a:rPr lang="en-US" dirty="0"/>
               <a:t>Il ramo del pasto. Quando il verme mangia, la coda non si muove, quindi non c'è alcuna cella da cancellare: erase_on viene messo a zero per dirlo.
+DA COMPRENDERE OGGI: gli array in memoria.
 Per il docente: Si aggiungono due righe: lo store di zero in erase_on.</a:t>
             </a:r>
             <a:endParaRPr lang="en-US" dirty="0"/>
@@ -1079,6 +1084,7 @@
             <a:r>
               <a:rPr lang="en-US" dirty="0"/>
               <a:t>Quando il verme non mangia, la coda lascia una cella: le sue coordinate vengono salvate in erase_x ed erase_y, ed erase_on diventa 1. Più sotto, la collisione con il corpo non è più gestita qui: è diventata una sola chiamata a game_is_over.
+DA COMPRENDERE OGGI: gli array in memoria.
 Per il docente: L'inizio è nuovo, sette righe; la fine è più corta che nella Parte 3, perché la transizione a OVER è diventata una funzione.</a:t>
             </a:r>
             <a:endParaRPr lang="en-US" dirty="0"/>
@@ -1168,6 +1174,7 @@
             <a:r>
               <a:rPr lang="en-US" dirty="0"/>
               <a:t>La nuova testa viene scritta nell'anello e nella mappa, esattamente come nella Parte 3. La slide è qui solo perché la funzione continua nella successiva.
+DA COMPRENDERE OGGI: gli array in memoria.
 Per il docente: Righe invariate, mostrate perché la funzione continua.</a:t>
             </a:r>
             <a:endParaRPr lang="en-US" dirty="0"/>
@@ -1257,6 +1264,7 @@
             <a:r>
               <a:rPr lang="en-US" dirty="0"/>
               <a:t>La nuova fine di step. Prima dirty viene messo a 1: c'è stato un passo, e draw ha da fare. Poi, se il verme ha mangiato: un punto in più, nuovo cibo, e una nota breve e acuta, la numero 72 per 60 millisecondi, richiesta con due li e una chiamata.
+DA COMPRENDERE OGGI: la convenzione di chiamata.
 Per il docente: Questo sostituisce la fine di step. Nota 72 per 60 millisecondi: il suono della Parte 2, attraverso la nuova funzione.</a:t>
             </a:r>
             <a:endParaRPr lang="en-US" dirty="0"/>
@@ -1346,6 +1354,7 @@
             <a:r>
               <a:rPr lang="en-US" dirty="0"/>
               <a:t>game_is_over raccoglie in un posto solo tutto ciò che comporta la transizione da PLAY a OVER: il nuovo stato, l'aggiornamento del punteggio migliore, dirty messo a 2 perché va disegnata un'intera schermata nuova, e una nota lunga e bassa, la numero 36 per 400 millisecondi. Una transizione della macchina a stati merita una funzione tutta sua.
+DA COMPRENDERE OGGI: macchine a stati finiti.
 Per il docente: Una transizione della macchina a stati merita una funzione tutta sua: stato, uscite e suono in un posto solo.</a:t>
             </a:r>
             <a:endParaRPr lang="en-US" dirty="0"/>
@@ -1524,6 +1533,7 @@
             <a:r>
               <a:rPr lang="en-US" dirty="0"/>
               <a:t>La nuova verm1_draw legge dirty e lo azzera subito. Se valeva zero, ritorna immediatamente: niente stack frame, niente chiamate, cinque istruzioni macchina. Se valeva 1, c'è stato un passo e viene chiamata draw_changes. Se valeva 2, lo stato è cambiato e draw_full ridisegna tutto. Il caso più frequente è il meno costoso, ed è il segno di un'ottimizzazione ben fatta.
+DA COMPRENDERE OGGI: il frame buffer.
 Per il docente: Sostituite verm1_draw. Il frame viene creato solo se c'è qualcosa da fare: il caso comune, nulla è cambiato, costa cinque istruzioni macchina.</a:t>
             </a:r>
             <a:endParaRPr lang="en-US" dirty="0"/>
@@ -1702,6 +1712,7 @@
             <a:r>
               <a:rPr lang="en-US" dirty="0"/>
               <a:t>draw_changes dipinge al massimo tre celle. Se erase_on è a 1, la cella lasciata dalla coda diventa nera. La vecchia testa viene ridipinta con il colore del corpo. Poi la nuova testa, il cibo e il punteggio. L'ordine conta: la testa può entrare proprio nella cella che la coda ha appena lasciato, quindi la cancellazione deve venire prima e la testa dopo.
+DA COMPRENDERE OGGI: il frame buffer.
 Per il docente: La testa può entrare nella cella che la coda ha appena lasciato: cancellare prima e disegnare la testa dopo dà l'immagine giusta.</a:t>
             </a:r>
             <a:endParaRPr lang="en-US" dirty="0"/>
@@ -1791,6 +1802,7 @@
             <a:r>
               <a:rPr lang="en-US" dirty="0"/>
               <a:t>draw_full è il corpo della vecchia verm1_draw: cancella lo schermo e disegna il punteggio; nello stato TITLE aggiunge l'invito e ritorna. Viene chiamata una volta per ogni cambio di stato, non a ogni frame.
+DA COMPRENDERE OGGI: il frame buffer.
 Per il docente: Chiamata una volta per ogni cambio di stato.</a:t>
             </a:r>
             <a:endParaRPr lang="en-US" dirty="0"/>
@@ -1880,6 +1892,7 @@
             <a:r>
               <a:rPr lang="en-US" dirty="0"/>
               <a:t>La seconda metà di draw_full: in PLAY e OVER disegna il verme e il cibo con le loro funzioni, e in OVER aggiunge le due parole del game over.
+DA COMPRENDERE OGGI: il frame buffer.
 Per il docente: La seconda metà di draw_full.</a:t>
             </a:r>
             <a:endParaRPr lang="en-US" dirty="0"/>
@@ -1969,6 +1982,7 @@
             <a:r>
               <a:rPr lang="en-US" dirty="0"/>
               <a:t>draw_head disegna una cella in verde brillante: la voce head_i dell'anello. È una piccola funzione con un solo compito, usata da draw_changes.
+DA COMPRENDERE OGGI: il frame buffer.
 Per il docente: Una piccola funzione usata da draw_changes.</a:t>
             </a:r>
             <a:endParaRPr lang="en-US" dirty="0"/>
@@ -2057,7 +2071,8 @@
           <a:p>
             <a:r>
               <a:rPr lang="en-US" dirty="0"/>
-              <a:t>draw_food: le tre righe che stavano dentro draw ora hanno un nome e due chiamanti, il disegno completo e quello parziale.</a:t>
+              <a:t>draw_food: le tre righe che stavano dentro draw ora hanno un nome e due chiamanti, il disegno completo e quello parziale.
+DA COMPRENDERE OGGI: il frame buffer.</a:t>
             </a:r>
             <a:endParaRPr lang="en-US" dirty="0"/>
           </a:p>
@@ -2235,6 +2250,7 @@
             <a:r>
               <a:rPr lang="en-US" dirty="0"/>
               <a:t>verm1_init con tre righe in più: dirty parte da 2, perché la schermata del titolo va disegnata una volta.
+DA COMPRENDERE OGGI: macchine a stati finiti.
 Per il docente: Sostituite verm1_init: si aggiungono tre righe.</a:t>
             </a:r>
             <a:endParaRPr lang="en-US" dirty="0"/>
@@ -2324,6 +2340,7 @@
             <a:r>
               <a:rPr lang="en-US" dirty="0"/>
               <a:t>In verm1_update, la transizione da OVER di nuovo a TITLE ora mette anche dirty a 2: un nuovo stato è una nuova schermata.
+DA COMPRENDERE OGGI: macchine a stati finiti.
 Per il docente: Sostituite la stessa parte di verm1_update.</a:t>
             </a:r>
             <a:endParaRPr lang="en-US" dirty="0"/>
@@ -2413,6 +2430,7 @@
             <a:r>
               <a:rPr lang="en-US" dirty="0"/>
               <a:t>Lo stesso in new_game, per la transizione da TITLE a PLAY. È la regola della tecnica: ogni transizione chiede un disegno completo, ogni passo uno parziale. Se ne dimenticate uno, lo schermo mostra uno stato che non è più vero, ed è l'errore tipico.
+DA COMPRENDERE OGGI: macchine a stati finiti.
 Per il docente: Ogni transizione della macchina chiede un disegno completo; ogni passo ne chiede uno parziale. Dimenticarne uno è il tipico errore di questa tecnica: lo schermo mostra uno stato che non è più vero.</a:t>
             </a:r>
             <a:endParaRPr lang="en-US" dirty="0"/>
@@ -2591,6 +2609,7 @@
             <a:r>
               <a:rPr lang="en-US" dirty="0"/>
               <a:t>Gli stessi due comandi di sempre. Prima di cambiare qualcosa, eseguite la Parte 3 in modalità debug e annotate ciò che mostra la telemetria durante una partita: istruzioni eseguite, frame al secondo, frame in ritardo. Questi numeri sono il «prima» della misura che chiude la lezione; senza di essi non potrete dire che cosa avete guadagnato.
+DA UTILIZZARE OGGI: gli strumenti di PRG32 (si usa, non si studia, in questo corso).
 Per il docente: Gli stessi due comandi. Prima di cominciare, eseguite la Parte 3 in modalità debug e annotate ciò che mostra la telemetria durante una partita: istruzioni eseguite (retired), frame al secondo, frame in ritardo. I numeri vi serviranno nel passo 5.</a:t>
             </a:r>
             <a:endParaRPr lang="en-US" dirty="0"/>
@@ -3562,6 +3581,7 @@
             <a:r>
               <a:rPr lang="en-US" dirty="0"/>
               <a:t>to_decimal ha un contratto scritto nel suo commento: il valore in a0, l'indirizzo di tre caratteri in a1. Per tre volte fa la stessa cosa: remu dà il resto della divisione per dieci, si somma 48, sb memorizza il byte, e divu lascia il quoziente per il giro successivo. Gli scostamenti sono 2, 1 e 0: dalle unità alle centinaia. È una funzione foglia: non chiama nessuno e usa solo registri temporanei, quindi non ha bisogno di alcuno stack frame.
+DA COMPRENDERE OGGI: quoziente e resto.
 Per il docente: I valori sopra 999 mostrerebbero solo le ultime tre cifre: un limite che nessun giocatore incontrerà presto. Le istruzioni di divisione sono lente, decine di cicli di clock ciascuna su un processore piccolo, e dieci per passo del verme non sono nulla.</a:t>
             </a:r>
             <a:endParaRPr lang="en-US" dirty="0"/>
@@ -3651,6 +3671,7 @@
             <a:r>
               <a:rPr lang="en-US" dirty="0"/>
               <a:t>La via più rapida: PRG32-QT sul vostro computer. Quattro passi, ciascuno con il suo comando. PRG32-QT si comporta come una scheda sulla porta 8080, ed è per questo che il comando di caricamento dice esp32c6. Con la modalità debug abilitata potete fermarvi su qualsiasi istruzione e leggere registri e memoria.
+DA UTILIZZARE OGGI: gli strumenti di PRG32 (si usa, non si studia, in questo corso).
 Per il docente: Eseguito dai test: la cartuccia di questa slide è compilata con questo comando ed eseguita sull'esecutore senza interfaccia di PRG32-QT. Senza la toolchain: importate il file .prg32 in PRG32-QT e scegliete Run Cartridge. Tasti: frecce o WASD per il joystick, Z o J per A, X o K per B, Invio per Start, Esc per tornare a Setup.</a:t>
             </a:r>
             <a:endParaRPr lang="en-US" dirty="0"/>
@@ -3740,6 +3761,7 @@
             <a:r>
               <a:rPr lang="en-US" dirty="0"/>
               <a:t>Lo stesso programma sull'emulatore. QEMU esegue il firmware vero su un chip emulato, quindi la cartuccia va compilata per l'architettura qemu. Caricate la cartuccia mentre QEMU è chiuso. Il firmware si apre sul menu Setup: scegliete Run Cartridge e lo slot. Ricordate che la tastiera è letta dal terminale, non dalla finestra con l'immagine.
+DA UTILIZZARE OGGI: gli strumenti di PRG32 (si usa, non si studia, in questo corso).
 Per il docente: Verificato dai test fino al caricamento: la cartuccia è compilata per l'architettura qemu e accettata nell'immagine flash dell'emulatore. Ciò che l'emulatore poi mostra non è verificato automaticamente: il QEMU di Espressif ha bisogno della sua finestra. Dall'ottobre 2026 il firmware parte da Setup: scegliete Run Cartridge, poi cart0.</a:t>
             </a:r>
             <a:endParaRPr lang="en-US" dirty="0"/>
@@ -3829,6 +3851,7 @@
             <a:r>
               <a:rPr lang="en-US" dirty="0"/>
               <a:t>Lo stesso programma sul kit. Il firmware si scrive una volta, via USB; dopo, le cartucce viaggiano sul Wi-Fi. Il comando di caricamento è quello usato per PRG32-QT con l'indirizzo della scheda. È l'unico host che i test automatici non eseguono: provatelo, e riferite ciò che vedete.
+DA UTILIZZARE OGGI: gli strumenti di PRG32 (si usa, non si studia, in questo corso).
 Per il docente: Non eseguito dai test: sulla macchina di prova non c'è una scheda. La cartuccia per l'architettura esp32c6 è compilata dai test; i passi sono quelli della documentazione di PRG32. Se la porta seriale non viene trovata, passatela esplicitamente. Per usare il Wi-Fi dell'aula: python3 -m prg32 wifi set --ssid NOME --password PASSWORD --mode sta.</a:t>
             </a:r>
             <a:endParaRPr lang="en-US" dirty="0"/>
@@ -3918,6 +3941,7 @@
             <a:r>
               <a:rPr lang="en-US" dirty="0"/>
               <a:t>I cinque sintomi più comuni, che cosa significa ciascuno, e che cosa fare. Leggete il messaggio prima di cambiare qualcosa: quasi sempre nomina la causa.
+DA UTILIZZARE OGGI: gli strumenti di PRG32 (si usa, non si studia, in questo corso).
 Per il docente: Le prime tre righe coprono la maggior parte dei casi. Quando chiedete aiuto, incollate il comando e l'intero messaggio come testo. docs/usage/troubleshooting.md del repository di PRG32 ha l'elenco completo.</a:t>
             </a:r>
             <a:endParaRPr lang="en-US" dirty="0"/>
@@ -4096,6 +4120,7 @@
             <a:r>
               <a:rPr lang="en-US" dirty="0"/>
               <a:t>draw_score sostituisce quella della Parte 3. Chiama to_decimal due volte, una per il punteggio e una per il punteggio migliore, ogni volta con l'indirizzo, dentro una stringa, in cui devono andare le cifre: best_txt+5 salta la parola BEST e lo spazio. Poi le due stringhe si disegnano come qualunque altro testo. Poiché il testo viene disegnato con il suo sfondo, le nuove cifre coprono le vecchie.
+DA COMPRENDERE OGGI: caratteri e stringhe.
 Per il docente: score_txt e best_txt sono stringhe in .data, non in .rodata: il programma ci scrive dentro. Il testo viene disegnato con il suo colore di sfondo, quindi le nuove cifre coprono le vecchie senza cancellare.</a:t>
             </a:r>
             <a:endParaRPr lang="en-US" dirty="0"/>
@@ -4185,6 +4210,7 @@
             <a:r>
               <a:rPr lang="en-US" dirty="0"/>
               <a:t>La nuova sezione .data. Due stringhe che il programma compila: stanno in .data e non in .rodata proprio perché il programma ci scrive dentro. Poi sei nuove variabili: dirty, la vecchia posizione della testa, e la cella da cancellare. Non vengono usate fino al terzo passo; scrivetele adesso, così la sezione si scrive una volta sola.
+DA COMPRENDERE OGGI: caratteri e stringhe.
 Per il docente: Scrivetela tutta adesso. Le sei variabili da dirty a erase_y non vengono usate fino al passo 3.</a:t>
             </a:r>
             <a:endParaRPr lang="en-US" dirty="0"/>
@@ -4363,6 +4389,7 @@
             <a:r>
               <a:rPr lang="en-US" dirty="0"/>
               <a:t>La costante SPEED_Q8 è sostituita da due: un minimo di 32 e un massimo di 96. Sono valori in virgola fissa, in 256-esimi di cella per frame, come nella Parte 2: 32 significa un passo ogni otto frame, 96 significa tre passi ogni otto frame.
+DA COMPRENDERE OGGI: la virgola fissa.
 Per il docente: Sostituite le costanti della Parte 3. Cambiano solo le due righe SPEED.</a:t>
             </a:r>
             <a:endParaRPr lang="en-US" dirty="0"/>
@@ -4452,6 +4479,7 @@
             <a:r>
               <a:rPr lang="en-US" dirty="0"/>
               <a:t>Il timer alla fine di play_update. La velocità è 32 più quattro volte il punteggio: uno scorrimento di due posizioni e una somma. Poi un confronto tiene il minore tra questo valore e il massimo. Il resto è il timer che conoscete: la velocità si somma a un accumulatore, e si fa un passo quando questo supera 256. Un valore che segue una retta e poi resta a un limite è una saturazione.
+DA COMPRENDERE OGGI: la virgola fissa.
 Per il docente: Sostituite il timer alla fine di play_update. Una saturazione: il valore segue una retta e poi resta al limite, come il clamp del primo laboratorio. Con la virgola fissa la velocità cambia di un sessantaquattresimo di cella per frame a ogni pasto: nessuna velocità intera potrebbe essere così fine.</a:t>
             </a:r>
             <a:endParaRPr lang="en-US" dirty="0"/>
@@ -5572,6 +5600,420 @@
       </p:pic>
       <p:sp>
         <p:nvSpPr>
+          <p:cNvPr id="15" name="Shape 12"/>
+          <p:cNvSpPr/>
+          <p:nvPr/>
+        </p:nvSpPr>
+        <p:spPr>
+          <a:xfrm>
+            <a:off x="8910777" y="91440"/>
+            <a:ext cx="2732278" cy="274320"/>
+          </a:xfrm>
+          <a:prstGeom prst="rect">
+            <a:avLst/>
+          </a:prstGeom>
+          <a:solidFill>
+            <a:srgbClr val="F3E8FF"/>
+          </a:solidFill>
+          <a:ln w="12700">
+            <a:solidFill>
+              <a:srgbClr val="7E22CE"/>
+            </a:solidFill>
+            <a:prstDash val="dash"/>
+          </a:ln>
+        </p:spPr>
+      </p:sp>
+      <p:sp>
+        <p:nvSpPr>
+          <p:cNvPr id="16" name="Shape 13"/>
+          <p:cNvSpPr/>
+          <p:nvPr/>
+        </p:nvSpPr>
+        <p:spPr>
+          <a:xfrm>
+            <a:off x="8938209" y="128016"/>
+            <a:ext cx="45720" cy="45720"/>
+          </a:xfrm>
+          <a:prstGeom prst="rect">
+            <a:avLst/>
+          </a:prstGeom>
+          <a:solidFill>
+            <a:srgbClr val="7E22CE"/>
+          </a:solidFill>
+          <a:ln w="12700">
+            <a:solidFill>
+              <a:srgbClr val="7E22CE"/>
+            </a:solidFill>
+            <a:prstDash val="solid"/>
+          </a:ln>
+        </p:spPr>
+      </p:sp>
+      <p:sp>
+        <p:nvSpPr>
+          <p:cNvPr id="17" name="Shape 14"/>
+          <p:cNvSpPr/>
+          <p:nvPr/>
+        </p:nvSpPr>
+        <p:spPr>
+          <a:xfrm>
+            <a:off x="8938209" y="205740"/>
+            <a:ext cx="45720" cy="45720"/>
+          </a:xfrm>
+          <a:prstGeom prst="rect">
+            <a:avLst/>
+          </a:prstGeom>
+          <a:solidFill>
+            <a:srgbClr val="7E22CE"/>
+          </a:solidFill>
+          <a:ln w="12700">
+            <a:solidFill>
+              <a:srgbClr val="7E22CE"/>
+            </a:solidFill>
+            <a:prstDash val="solid"/>
+          </a:ln>
+        </p:spPr>
+      </p:sp>
+      <p:sp>
+        <p:nvSpPr>
+          <p:cNvPr id="18" name="Shape 15"/>
+          <p:cNvSpPr/>
+          <p:nvPr/>
+        </p:nvSpPr>
+        <p:spPr>
+          <a:xfrm>
+            <a:off x="8938209" y="283464"/>
+            <a:ext cx="45720" cy="45720"/>
+          </a:xfrm>
+          <a:prstGeom prst="rect">
+            <a:avLst/>
+          </a:prstGeom>
+          <a:solidFill>
+            <a:srgbClr val="7E22CE"/>
+          </a:solidFill>
+          <a:ln w="12700">
+            <a:solidFill>
+              <a:srgbClr val="7E22CE"/>
+            </a:solidFill>
+            <a:prstDash val="solid"/>
+          </a:ln>
+        </p:spPr>
+      </p:sp>
+      <p:pic>
+        <p:nvPicPr>
+          <p:cNvPr id="19" name="Image 1" descr="preencoded.png">    </p:cNvPr>
+          <p:cNvPicPr>
+            <a:picLocks noChangeAspect="1"/>
+          </p:cNvPicPr>
+          <p:nvPr/>
+        </p:nvPicPr>
+        <p:blipFill>
+          <a:blip r:embed="rId2"/>
+          <a:stretch>
+            <a:fillRect/>
+          </a:stretch>
+        </p:blipFill>
+        <p:spPr>
+          <a:xfrm>
+            <a:off x="9038793" y="128016"/>
+            <a:ext cx="201168" cy="201168"/>
+          </a:xfrm>
+          <a:prstGeom prst="rect">
+            <a:avLst/>
+          </a:prstGeom>
+        </p:spPr>
+      </p:pic>
+      <p:sp>
+        <p:nvSpPr>
+          <p:cNvPr id="20" name="Text 16"/>
+          <p:cNvSpPr txBox="1"/>
+          <p:nvPr/>
+        </p:nvSpPr>
+        <p:spPr>
+          <a:xfrm>
+            <a:off x="9294825" y="91440"/>
+            <a:ext cx="2311654" cy="274320"/>
+          </a:xfrm>
+          <a:prstGeom prst="rect">
+            <a:avLst/>
+          </a:prstGeom>
+          <a:noFill/>
+          <a:ln/>
+        </p:spPr>
+        <p:txBody>
+          <a:bodyPr wrap="square" lIns="0" tIns="0" rIns="0" bIns="0" rtlCol="0" anchor="ctr"/>
+          <a:lstStyle/>
+          <a:p>
+            <a:pPr indent="0" marL="0">
+              <a:buNone/>
+            </a:pPr>
+            <a:r>
+              <a:rPr lang="en-US" sz="1100" b="1" dirty="0">
+                <a:solidFill>
+                  <a:srgbClr val="6B21A8"/>
+                </a:solidFill>
+                <a:latin typeface="Calibri" pitchFamily="34" charset="0"/>
+                <a:ea typeface="Calibri" pitchFamily="34" charset="-122"/>
+                <a:cs typeface="Calibri" pitchFamily="34" charset="-120"/>
+              </a:rPr>
+              <a:t>DA COMPRENDERE PIÙ AVANTI</a:t>
+            </a:r>
+            <a:endParaRPr lang="en-US" sz="1100" dirty="0"/>
+          </a:p>
+        </p:txBody>
+      </p:sp>
+      <p:sp>
+        <p:nvSpPr>
+          <p:cNvPr id="21" name="Shape 17"/>
+          <p:cNvSpPr/>
+          <p:nvPr/>
+        </p:nvSpPr>
+        <p:spPr>
+          <a:xfrm>
+            <a:off x="6675069" y="91440"/>
+            <a:ext cx="2125980" cy="274320"/>
+          </a:xfrm>
+          <a:prstGeom prst="rect">
+            <a:avLst/>
+          </a:prstGeom>
+          <a:solidFill>
+            <a:srgbClr val="FEF3C7"/>
+          </a:solidFill>
+          <a:ln w="12700">
+            <a:solidFill>
+              <a:srgbClr val="B45309"/>
+            </a:solidFill>
+            <a:prstDash val="solid"/>
+          </a:ln>
+        </p:spPr>
+      </p:sp>
+      <p:sp>
+        <p:nvSpPr>
+          <p:cNvPr id="22" name="Shape 18"/>
+          <p:cNvSpPr/>
+          <p:nvPr/>
+        </p:nvSpPr>
+        <p:spPr>
+          <a:xfrm>
+            <a:off x="6675069" y="91440"/>
+            <a:ext cx="27432" cy="274320"/>
+          </a:xfrm>
+          <a:prstGeom prst="rect">
+            <a:avLst/>
+          </a:prstGeom>
+          <a:solidFill>
+            <a:srgbClr val="B45309"/>
+          </a:solidFill>
+          <a:ln w="12700">
+            <a:solidFill>
+              <a:srgbClr val="B45309"/>
+            </a:solidFill>
+            <a:prstDash val="solid"/>
+          </a:ln>
+        </p:spPr>
+      </p:sp>
+      <p:sp>
+        <p:nvSpPr>
+          <p:cNvPr id="23" name="Shape 19"/>
+          <p:cNvSpPr/>
+          <p:nvPr/>
+        </p:nvSpPr>
+        <p:spPr>
+          <a:xfrm>
+            <a:off x="6729933" y="91440"/>
+            <a:ext cx="27432" cy="274320"/>
+          </a:xfrm>
+          <a:prstGeom prst="rect">
+            <a:avLst/>
+          </a:prstGeom>
+          <a:solidFill>
+            <a:srgbClr val="B45309"/>
+          </a:solidFill>
+          <a:ln w="12700">
+            <a:solidFill>
+              <a:srgbClr val="B45309"/>
+            </a:solidFill>
+            <a:prstDash val="solid"/>
+          </a:ln>
+        </p:spPr>
+      </p:sp>
+      <p:pic>
+        <p:nvPicPr>
+          <p:cNvPr id="24" name="Image 2" descr="preencoded.png">    </p:cNvPr>
+          <p:cNvPicPr>
+            <a:picLocks noChangeAspect="1"/>
+          </p:cNvPicPr>
+          <p:nvPr/>
+        </p:nvPicPr>
+        <p:blipFill>
+          <a:blip r:embed="rId3"/>
+          <a:stretch>
+            <a:fillRect/>
+          </a:stretch>
+        </p:blipFill>
+        <p:spPr>
+          <a:xfrm>
+            <a:off x="6803085" y="128016"/>
+            <a:ext cx="201168" cy="201168"/>
+          </a:xfrm>
+          <a:prstGeom prst="rect">
+            <a:avLst/>
+          </a:prstGeom>
+        </p:spPr>
+      </p:pic>
+      <p:sp>
+        <p:nvSpPr>
+          <p:cNvPr id="25" name="Text 20"/>
+          <p:cNvSpPr txBox="1"/>
+          <p:nvPr/>
+        </p:nvSpPr>
+        <p:spPr>
+          <a:xfrm>
+            <a:off x="7059117" y="91440"/>
+            <a:ext cx="1705356" cy="274320"/>
+          </a:xfrm>
+          <a:prstGeom prst="rect">
+            <a:avLst/>
+          </a:prstGeom>
+          <a:noFill/>
+          <a:ln/>
+        </p:spPr>
+        <p:txBody>
+          <a:bodyPr wrap="square" lIns="0" tIns="0" rIns="0" bIns="0" rtlCol="0" anchor="ctr"/>
+          <a:lstStyle/>
+          <a:p>
+            <a:pPr indent="0" marL="0">
+              <a:buNone/>
+            </a:pPr>
+            <a:r>
+              <a:rPr lang="en-US" sz="1100" b="1" dirty="0">
+                <a:solidFill>
+                  <a:srgbClr val="92400E"/>
+                </a:solidFill>
+                <a:latin typeface="Calibri" pitchFamily="34" charset="0"/>
+                <a:ea typeface="Calibri" pitchFamily="34" charset="-122"/>
+                <a:cs typeface="Calibri" pitchFamily="34" charset="-120"/>
+              </a:rPr>
+              <a:t>DA UTILIZZARE OGGI</a:t>
+            </a:r>
+            <a:endParaRPr lang="en-US" sz="1100" dirty="0"/>
+          </a:p>
+        </p:txBody>
+      </p:sp>
+      <p:sp>
+        <p:nvSpPr>
+          <p:cNvPr id="26" name="Shape 21"/>
+          <p:cNvSpPr/>
+          <p:nvPr/>
+        </p:nvSpPr>
+        <p:spPr>
+          <a:xfrm>
+            <a:off x="4352747" y="91440"/>
+            <a:ext cx="2212594" cy="274320"/>
+          </a:xfrm>
+          <a:prstGeom prst="rect">
+            <a:avLst/>
+          </a:prstGeom>
+          <a:solidFill>
+            <a:srgbClr val="E0F2FE"/>
+          </a:solidFill>
+          <a:ln w="12700">
+            <a:solidFill>
+              <a:srgbClr val="0369A1"/>
+            </a:solidFill>
+            <a:prstDash val="solid"/>
+          </a:ln>
+        </p:spPr>
+      </p:sp>
+      <p:sp>
+        <p:nvSpPr>
+          <p:cNvPr id="27" name="Shape 22"/>
+          <p:cNvSpPr/>
+          <p:nvPr/>
+        </p:nvSpPr>
+        <p:spPr>
+          <a:xfrm>
+            <a:off x="4352747" y="91440"/>
+            <a:ext cx="73152" cy="274320"/>
+          </a:xfrm>
+          <a:prstGeom prst="rect">
+            <a:avLst/>
+          </a:prstGeom>
+          <a:solidFill>
+            <a:srgbClr val="0369A1"/>
+          </a:solidFill>
+          <a:ln w="12700">
+            <a:solidFill>
+              <a:srgbClr val="0369A1"/>
+            </a:solidFill>
+            <a:prstDash val="solid"/>
+          </a:ln>
+        </p:spPr>
+      </p:sp>
+      <p:pic>
+        <p:nvPicPr>
+          <p:cNvPr id="28" name="Image 3" descr="preencoded.png">    </p:cNvPr>
+          <p:cNvPicPr>
+            <a:picLocks noChangeAspect="1"/>
+          </p:cNvPicPr>
+          <p:nvPr/>
+        </p:nvPicPr>
+        <p:blipFill>
+          <a:blip r:embed="rId4"/>
+          <a:stretch>
+            <a:fillRect/>
+          </a:stretch>
+        </p:blipFill>
+        <p:spPr>
+          <a:xfrm>
+            <a:off x="4480763" y="128016"/>
+            <a:ext cx="201168" cy="201168"/>
+          </a:xfrm>
+          <a:prstGeom prst="rect">
+            <a:avLst/>
+          </a:prstGeom>
+        </p:spPr>
+      </p:pic>
+      <p:sp>
+        <p:nvSpPr>
+          <p:cNvPr id="29" name="Text 23"/>
+          <p:cNvSpPr txBox="1"/>
+          <p:nvPr/>
+        </p:nvSpPr>
+        <p:spPr>
+          <a:xfrm>
+            <a:off x="4736795" y="91440"/>
+            <a:ext cx="1791970" cy="274320"/>
+          </a:xfrm>
+          <a:prstGeom prst="rect">
+            <a:avLst/>
+          </a:prstGeom>
+          <a:noFill/>
+          <a:ln/>
+        </p:spPr>
+        <p:txBody>
+          <a:bodyPr wrap="square" lIns="0" tIns="0" rIns="0" bIns="0" rtlCol="0" anchor="ctr"/>
+          <a:lstStyle/>
+          <a:p>
+            <a:pPr indent="0" marL="0">
+              <a:buNone/>
+            </a:pPr>
+            <a:r>
+              <a:rPr lang="en-US" sz="1100" b="1" dirty="0">
+                <a:solidFill>
+                  <a:srgbClr val="075985"/>
+                </a:solidFill>
+                <a:latin typeface="Calibri" pitchFamily="34" charset="0"/>
+                <a:ea typeface="Calibri" pitchFamily="34" charset="-122"/>
+                <a:cs typeface="Calibri" pitchFamily="34" charset="-120"/>
+              </a:rPr>
+              <a:t>DA COMPRENDERE OGGI</a:t>
+            </a:r>
+            <a:endParaRPr lang="en-US" sz="1100" dirty="0"/>
+          </a:p>
+        </p:txBody>
+      </p:sp>
+      <p:sp>
+        <p:nvSpPr>
           <p:cNvPr id="25" name="Slide Number Placeholder 0"/>
           <p:cNvSpPr>
             <a:spLocks noGrp="1"/>
@@ -6922,6 +7364,133 @@
       </p:sp>
       <p:sp>
         <p:nvSpPr>
+          <p:cNvPr id="14" name="Shape 12"/>
+          <p:cNvSpPr/>
+          <p:nvPr/>
+        </p:nvSpPr>
+        <p:spPr>
+          <a:xfrm>
+            <a:off x="7526350" y="91440"/>
+            <a:ext cx="4116705" cy="274320"/>
+          </a:xfrm>
+          <a:prstGeom prst="rect">
+            <a:avLst/>
+          </a:prstGeom>
+          <a:solidFill>
+            <a:srgbClr val="E0F2FE"/>
+          </a:solidFill>
+          <a:ln w="12700">
+            <a:solidFill>
+              <a:srgbClr val="0369A1"/>
+            </a:solidFill>
+            <a:prstDash val="solid"/>
+          </a:ln>
+        </p:spPr>
+      </p:sp>
+      <p:sp>
+        <p:nvSpPr>
+          <p:cNvPr id="15" name="Shape 13"/>
+          <p:cNvSpPr/>
+          <p:nvPr/>
+        </p:nvSpPr>
+        <p:spPr>
+          <a:xfrm>
+            <a:off x="7526350" y="91440"/>
+            <a:ext cx="73152" cy="274320"/>
+          </a:xfrm>
+          <a:prstGeom prst="rect">
+            <a:avLst/>
+          </a:prstGeom>
+          <a:solidFill>
+            <a:srgbClr val="0369A1"/>
+          </a:solidFill>
+          <a:ln w="12700">
+            <a:solidFill>
+              <a:srgbClr val="0369A1"/>
+            </a:solidFill>
+            <a:prstDash val="solid"/>
+          </a:ln>
+        </p:spPr>
+      </p:sp>
+      <p:pic>
+        <p:nvPicPr>
+          <p:cNvPr id="16" name="Image 0" descr="preencoded.png">    </p:cNvPr>
+          <p:cNvPicPr>
+            <a:picLocks noChangeAspect="1"/>
+          </p:cNvPicPr>
+          <p:nvPr/>
+        </p:nvPicPr>
+        <p:blipFill>
+          <a:blip r:embed="rId1"/>
+          <a:stretch>
+            <a:fillRect/>
+          </a:stretch>
+        </p:blipFill>
+        <p:spPr>
+          <a:xfrm>
+            <a:off x="7654366" y="128016"/>
+            <a:ext cx="201168" cy="201168"/>
+          </a:xfrm>
+          <a:prstGeom prst="rect">
+            <a:avLst/>
+          </a:prstGeom>
+        </p:spPr>
+      </p:pic>
+      <p:sp>
+        <p:nvSpPr>
+          <p:cNvPr id="17" name="Text 14"/>
+          <p:cNvSpPr txBox="1"/>
+          <p:nvPr/>
+        </p:nvSpPr>
+        <p:spPr>
+          <a:xfrm>
+            <a:off x="7910398" y="91440"/>
+            <a:ext cx="3696081" cy="274320"/>
+          </a:xfrm>
+          <a:prstGeom prst="rect">
+            <a:avLst/>
+          </a:prstGeom>
+          <a:noFill/>
+          <a:ln/>
+        </p:spPr>
+        <p:txBody>
+          <a:bodyPr wrap="square" lIns="0" tIns="0" rIns="0" bIns="0" rtlCol="0" anchor="ctr"/>
+          <a:lstStyle/>
+          <a:p>
+            <a:pPr indent="0" marL="0">
+              <a:buNone/>
+            </a:pPr>
+            <a:r>
+              <a:rPr lang="en-US" sz="1100" b="1" dirty="0">
+                <a:solidFill>
+                  <a:srgbClr val="075985"/>
+                </a:solidFill>
+                <a:latin typeface="Calibri" pitchFamily="34" charset="0"/>
+                <a:ea typeface="Calibri" pitchFamily="34" charset="-122"/>
+                <a:cs typeface="Calibri" pitchFamily="34" charset="-120"/>
+              </a:rPr>
+              <a:t>DA COMPRENDERE OGGI</a:t>
+            </a:r>
+            <a:pPr indent="0" marL="0">
+              <a:buNone/>
+            </a:pPr>
+            <a:r>
+              <a:rPr lang="en-US" sz="1100" dirty="0">
+                <a:solidFill>
+                  <a:srgbClr val="075985"/>
+                </a:solidFill>
+                <a:latin typeface="Calibri" pitchFamily="34" charset="0"/>
+                <a:ea typeface="Calibri" pitchFamily="34" charset="-122"/>
+                <a:cs typeface="Calibri" pitchFamily="34" charset="-120"/>
+              </a:rPr>
+              <a:t> · la convenzione di chiamata</a:t>
+            </a:r>
+            <a:endParaRPr lang="en-US" sz="1100" dirty="0"/>
+          </a:p>
+        </p:txBody>
+      </p:sp>
+      <p:sp>
+        <p:nvSpPr>
           <p:cNvPr id="25" name="Slide Number Placeholder 0"/>
           <p:cNvSpPr>
             <a:spLocks noGrp="1"/>
@@ -7905,6 +8474,133 @@
       </p:sp>
       <p:sp>
         <p:nvSpPr>
+          <p:cNvPr id="14" name="Shape 12"/>
+          <p:cNvSpPr/>
+          <p:nvPr/>
+        </p:nvSpPr>
+        <p:spPr>
+          <a:xfrm>
+            <a:off x="7920304" y="91440"/>
+            <a:ext cx="3722751" cy="274320"/>
+          </a:xfrm>
+          <a:prstGeom prst="rect">
+            <a:avLst/>
+          </a:prstGeom>
+          <a:solidFill>
+            <a:srgbClr val="E0F2FE"/>
+          </a:solidFill>
+          <a:ln w="12700">
+            <a:solidFill>
+              <a:srgbClr val="0369A1"/>
+            </a:solidFill>
+            <a:prstDash val="solid"/>
+          </a:ln>
+        </p:spPr>
+      </p:sp>
+      <p:sp>
+        <p:nvSpPr>
+          <p:cNvPr id="15" name="Shape 13"/>
+          <p:cNvSpPr/>
+          <p:nvPr/>
+        </p:nvSpPr>
+        <p:spPr>
+          <a:xfrm>
+            <a:off x="7920304" y="91440"/>
+            <a:ext cx="73152" cy="274320"/>
+          </a:xfrm>
+          <a:prstGeom prst="rect">
+            <a:avLst/>
+          </a:prstGeom>
+          <a:solidFill>
+            <a:srgbClr val="0369A1"/>
+          </a:solidFill>
+          <a:ln w="12700">
+            <a:solidFill>
+              <a:srgbClr val="0369A1"/>
+            </a:solidFill>
+            <a:prstDash val="solid"/>
+          </a:ln>
+        </p:spPr>
+      </p:sp>
+      <p:pic>
+        <p:nvPicPr>
+          <p:cNvPr id="16" name="Image 0" descr="preencoded.png">    </p:cNvPr>
+          <p:cNvPicPr>
+            <a:picLocks noChangeAspect="1"/>
+          </p:cNvPicPr>
+          <p:nvPr/>
+        </p:nvPicPr>
+        <p:blipFill>
+          <a:blip r:embed="rId1"/>
+          <a:stretch>
+            <a:fillRect/>
+          </a:stretch>
+        </p:blipFill>
+        <p:spPr>
+          <a:xfrm>
+            <a:off x="8048320" y="128016"/>
+            <a:ext cx="201168" cy="201168"/>
+          </a:xfrm>
+          <a:prstGeom prst="rect">
+            <a:avLst/>
+          </a:prstGeom>
+        </p:spPr>
+      </p:pic>
+      <p:sp>
+        <p:nvSpPr>
+          <p:cNvPr id="17" name="Text 14"/>
+          <p:cNvSpPr txBox="1"/>
+          <p:nvPr/>
+        </p:nvSpPr>
+        <p:spPr>
+          <a:xfrm>
+            <a:off x="8304352" y="91440"/>
+            <a:ext cx="3302127" cy="274320"/>
+          </a:xfrm>
+          <a:prstGeom prst="rect">
+            <a:avLst/>
+          </a:prstGeom>
+          <a:noFill/>
+          <a:ln/>
+        </p:spPr>
+        <p:txBody>
+          <a:bodyPr wrap="square" lIns="0" tIns="0" rIns="0" bIns="0" rtlCol="0" anchor="ctr"/>
+          <a:lstStyle/>
+          <a:p>
+            <a:pPr indent="0" marL="0">
+              <a:buNone/>
+            </a:pPr>
+            <a:r>
+              <a:rPr lang="en-US" sz="1100" b="1" dirty="0">
+                <a:solidFill>
+                  <a:srgbClr val="075985"/>
+                </a:solidFill>
+                <a:latin typeface="Calibri" pitchFamily="34" charset="0"/>
+                <a:ea typeface="Calibri" pitchFamily="34" charset="-122"/>
+                <a:cs typeface="Calibri" pitchFamily="34" charset="-120"/>
+              </a:rPr>
+              <a:t>DA COMPRENDERE OGGI</a:t>
+            </a:r>
+            <a:pPr indent="0" marL="0">
+              <a:buNone/>
+            </a:pPr>
+            <a:r>
+              <a:rPr lang="en-US" sz="1100" dirty="0">
+                <a:solidFill>
+                  <a:srgbClr val="075985"/>
+                </a:solidFill>
+                <a:latin typeface="Calibri" pitchFamily="34" charset="0"/>
+                <a:ea typeface="Calibri" pitchFamily="34" charset="-122"/>
+                <a:cs typeface="Calibri" pitchFamily="34" charset="-120"/>
+              </a:rPr>
+              <a:t> · gli array in memoria</a:t>
+            </a:r>
+            <a:endParaRPr lang="en-US" sz="1100" dirty="0"/>
+          </a:p>
+        </p:txBody>
+      </p:sp>
+      <p:sp>
+        <p:nvSpPr>
           <p:cNvPr id="25" name="Slide Number Placeholder 0"/>
           <p:cNvSpPr>
             <a:spLocks noGrp="1"/>
@@ -8854,6 +9550,133 @@
       </p:sp>
       <p:sp>
         <p:nvSpPr>
+          <p:cNvPr id="11" name="Shape 9"/>
+          <p:cNvSpPr/>
+          <p:nvPr/>
+        </p:nvSpPr>
+        <p:spPr>
+          <a:xfrm>
+            <a:off x="7920304" y="91440"/>
+            <a:ext cx="3722751" cy="274320"/>
+          </a:xfrm>
+          <a:prstGeom prst="rect">
+            <a:avLst/>
+          </a:prstGeom>
+          <a:solidFill>
+            <a:srgbClr val="E0F2FE"/>
+          </a:solidFill>
+          <a:ln w="12700">
+            <a:solidFill>
+              <a:srgbClr val="0369A1"/>
+            </a:solidFill>
+            <a:prstDash val="solid"/>
+          </a:ln>
+        </p:spPr>
+      </p:sp>
+      <p:sp>
+        <p:nvSpPr>
+          <p:cNvPr id="12" name="Shape 10"/>
+          <p:cNvSpPr/>
+          <p:nvPr/>
+        </p:nvSpPr>
+        <p:spPr>
+          <a:xfrm>
+            <a:off x="7920304" y="91440"/>
+            <a:ext cx="73152" cy="274320"/>
+          </a:xfrm>
+          <a:prstGeom prst="rect">
+            <a:avLst/>
+          </a:prstGeom>
+          <a:solidFill>
+            <a:srgbClr val="0369A1"/>
+          </a:solidFill>
+          <a:ln w="12700">
+            <a:solidFill>
+              <a:srgbClr val="0369A1"/>
+            </a:solidFill>
+            <a:prstDash val="solid"/>
+          </a:ln>
+        </p:spPr>
+      </p:sp>
+      <p:pic>
+        <p:nvPicPr>
+          <p:cNvPr id="13" name="Image 0" descr="preencoded.png">    </p:cNvPr>
+          <p:cNvPicPr>
+            <a:picLocks noChangeAspect="1"/>
+          </p:cNvPicPr>
+          <p:nvPr/>
+        </p:nvPicPr>
+        <p:blipFill>
+          <a:blip r:embed="rId1"/>
+          <a:stretch>
+            <a:fillRect/>
+          </a:stretch>
+        </p:blipFill>
+        <p:spPr>
+          <a:xfrm>
+            <a:off x="8048320" y="128016"/>
+            <a:ext cx="201168" cy="201168"/>
+          </a:xfrm>
+          <a:prstGeom prst="rect">
+            <a:avLst/>
+          </a:prstGeom>
+        </p:spPr>
+      </p:pic>
+      <p:sp>
+        <p:nvSpPr>
+          <p:cNvPr id="14" name="Text 11"/>
+          <p:cNvSpPr txBox="1"/>
+          <p:nvPr/>
+        </p:nvSpPr>
+        <p:spPr>
+          <a:xfrm>
+            <a:off x="8304352" y="91440"/>
+            <a:ext cx="3302127" cy="274320"/>
+          </a:xfrm>
+          <a:prstGeom prst="rect">
+            <a:avLst/>
+          </a:prstGeom>
+          <a:noFill/>
+          <a:ln/>
+        </p:spPr>
+        <p:txBody>
+          <a:bodyPr wrap="square" lIns="0" tIns="0" rIns="0" bIns="0" rtlCol="0" anchor="ctr"/>
+          <a:lstStyle/>
+          <a:p>
+            <a:pPr indent="0" marL="0">
+              <a:buNone/>
+            </a:pPr>
+            <a:r>
+              <a:rPr lang="en-US" sz="1100" b="1" dirty="0">
+                <a:solidFill>
+                  <a:srgbClr val="075985"/>
+                </a:solidFill>
+                <a:latin typeface="Calibri" pitchFamily="34" charset="0"/>
+                <a:ea typeface="Calibri" pitchFamily="34" charset="-122"/>
+                <a:cs typeface="Calibri" pitchFamily="34" charset="-120"/>
+              </a:rPr>
+              <a:t>DA COMPRENDERE OGGI</a:t>
+            </a:r>
+            <a:pPr indent="0" marL="0">
+              <a:buNone/>
+            </a:pPr>
+            <a:r>
+              <a:rPr lang="en-US" sz="1100" dirty="0">
+                <a:solidFill>
+                  <a:srgbClr val="075985"/>
+                </a:solidFill>
+                <a:latin typeface="Calibri" pitchFamily="34" charset="0"/>
+                <a:ea typeface="Calibri" pitchFamily="34" charset="-122"/>
+                <a:cs typeface="Calibri" pitchFamily="34" charset="-120"/>
+              </a:rPr>
+              <a:t> · gli array in memoria</a:t>
+            </a:r>
+            <a:endParaRPr lang="en-US" sz="1100" dirty="0"/>
+          </a:p>
+        </p:txBody>
+      </p:sp>
+      <p:sp>
+        <p:nvSpPr>
           <p:cNvPr id="25" name="Slide Number Placeholder 0"/>
           <p:cNvSpPr>
             <a:spLocks noGrp="1"/>
@@ -9814,6 +10637,133 @@
       </p:sp>
       <p:sp>
         <p:nvSpPr>
+          <p:cNvPr id="14" name="Shape 12"/>
+          <p:cNvSpPr/>
+          <p:nvPr/>
+        </p:nvSpPr>
+        <p:spPr>
+          <a:xfrm>
+            <a:off x="7920304" y="91440"/>
+            <a:ext cx="3722751" cy="274320"/>
+          </a:xfrm>
+          <a:prstGeom prst="rect">
+            <a:avLst/>
+          </a:prstGeom>
+          <a:solidFill>
+            <a:srgbClr val="E0F2FE"/>
+          </a:solidFill>
+          <a:ln w="12700">
+            <a:solidFill>
+              <a:srgbClr val="0369A1"/>
+            </a:solidFill>
+            <a:prstDash val="solid"/>
+          </a:ln>
+        </p:spPr>
+      </p:sp>
+      <p:sp>
+        <p:nvSpPr>
+          <p:cNvPr id="15" name="Shape 13"/>
+          <p:cNvSpPr/>
+          <p:nvPr/>
+        </p:nvSpPr>
+        <p:spPr>
+          <a:xfrm>
+            <a:off x="7920304" y="91440"/>
+            <a:ext cx="73152" cy="274320"/>
+          </a:xfrm>
+          <a:prstGeom prst="rect">
+            <a:avLst/>
+          </a:prstGeom>
+          <a:solidFill>
+            <a:srgbClr val="0369A1"/>
+          </a:solidFill>
+          <a:ln w="12700">
+            <a:solidFill>
+              <a:srgbClr val="0369A1"/>
+            </a:solidFill>
+            <a:prstDash val="solid"/>
+          </a:ln>
+        </p:spPr>
+      </p:sp>
+      <p:pic>
+        <p:nvPicPr>
+          <p:cNvPr id="16" name="Image 0" descr="preencoded.png">    </p:cNvPr>
+          <p:cNvPicPr>
+            <a:picLocks noChangeAspect="1"/>
+          </p:cNvPicPr>
+          <p:nvPr/>
+        </p:nvPicPr>
+        <p:blipFill>
+          <a:blip r:embed="rId1"/>
+          <a:stretch>
+            <a:fillRect/>
+          </a:stretch>
+        </p:blipFill>
+        <p:spPr>
+          <a:xfrm>
+            <a:off x="8048320" y="128016"/>
+            <a:ext cx="201168" cy="201168"/>
+          </a:xfrm>
+          <a:prstGeom prst="rect">
+            <a:avLst/>
+          </a:prstGeom>
+        </p:spPr>
+      </p:pic>
+      <p:sp>
+        <p:nvSpPr>
+          <p:cNvPr id="17" name="Text 14"/>
+          <p:cNvSpPr txBox="1"/>
+          <p:nvPr/>
+        </p:nvSpPr>
+        <p:spPr>
+          <a:xfrm>
+            <a:off x="8304352" y="91440"/>
+            <a:ext cx="3302127" cy="274320"/>
+          </a:xfrm>
+          <a:prstGeom prst="rect">
+            <a:avLst/>
+          </a:prstGeom>
+          <a:noFill/>
+          <a:ln/>
+        </p:spPr>
+        <p:txBody>
+          <a:bodyPr wrap="square" lIns="0" tIns="0" rIns="0" bIns="0" rtlCol="0" anchor="ctr"/>
+          <a:lstStyle/>
+          <a:p>
+            <a:pPr indent="0" marL="0">
+              <a:buNone/>
+            </a:pPr>
+            <a:r>
+              <a:rPr lang="en-US" sz="1100" b="1" dirty="0">
+                <a:solidFill>
+                  <a:srgbClr val="075985"/>
+                </a:solidFill>
+                <a:latin typeface="Calibri" pitchFamily="34" charset="0"/>
+                <a:ea typeface="Calibri" pitchFamily="34" charset="-122"/>
+                <a:cs typeface="Calibri" pitchFamily="34" charset="-120"/>
+              </a:rPr>
+              <a:t>DA COMPRENDERE OGGI</a:t>
+            </a:r>
+            <a:pPr indent="0" marL="0">
+              <a:buNone/>
+            </a:pPr>
+            <a:r>
+              <a:rPr lang="en-US" sz="1100" dirty="0">
+                <a:solidFill>
+                  <a:srgbClr val="075985"/>
+                </a:solidFill>
+                <a:latin typeface="Calibri" pitchFamily="34" charset="0"/>
+                <a:ea typeface="Calibri" pitchFamily="34" charset="-122"/>
+                <a:cs typeface="Calibri" pitchFamily="34" charset="-120"/>
+              </a:rPr>
+              <a:t> · gli array in memoria</a:t>
+            </a:r>
+            <a:endParaRPr lang="en-US" sz="1100" dirty="0"/>
+          </a:p>
+        </p:txBody>
+      </p:sp>
+      <p:sp>
+        <p:nvSpPr>
           <p:cNvPr id="25" name="Slide Number Placeholder 0"/>
           <p:cNvSpPr>
             <a:spLocks noGrp="1"/>
@@ -10466,6 +11416,133 @@
       </p:sp>
       <p:sp>
         <p:nvSpPr>
+          <p:cNvPr id="11" name="Shape 9"/>
+          <p:cNvSpPr/>
+          <p:nvPr/>
+        </p:nvSpPr>
+        <p:spPr>
+          <a:xfrm>
+            <a:off x="7920304" y="91440"/>
+            <a:ext cx="3722751" cy="274320"/>
+          </a:xfrm>
+          <a:prstGeom prst="rect">
+            <a:avLst/>
+          </a:prstGeom>
+          <a:solidFill>
+            <a:srgbClr val="E0F2FE"/>
+          </a:solidFill>
+          <a:ln w="12700">
+            <a:solidFill>
+              <a:srgbClr val="0369A1"/>
+            </a:solidFill>
+            <a:prstDash val="solid"/>
+          </a:ln>
+        </p:spPr>
+      </p:sp>
+      <p:sp>
+        <p:nvSpPr>
+          <p:cNvPr id="12" name="Shape 10"/>
+          <p:cNvSpPr/>
+          <p:nvPr/>
+        </p:nvSpPr>
+        <p:spPr>
+          <a:xfrm>
+            <a:off x="7920304" y="91440"/>
+            <a:ext cx="73152" cy="274320"/>
+          </a:xfrm>
+          <a:prstGeom prst="rect">
+            <a:avLst/>
+          </a:prstGeom>
+          <a:solidFill>
+            <a:srgbClr val="0369A1"/>
+          </a:solidFill>
+          <a:ln w="12700">
+            <a:solidFill>
+              <a:srgbClr val="0369A1"/>
+            </a:solidFill>
+            <a:prstDash val="solid"/>
+          </a:ln>
+        </p:spPr>
+      </p:sp>
+      <p:pic>
+        <p:nvPicPr>
+          <p:cNvPr id="13" name="Image 0" descr="preencoded.png">    </p:cNvPr>
+          <p:cNvPicPr>
+            <a:picLocks noChangeAspect="1"/>
+          </p:cNvPicPr>
+          <p:nvPr/>
+        </p:nvPicPr>
+        <p:blipFill>
+          <a:blip r:embed="rId1"/>
+          <a:stretch>
+            <a:fillRect/>
+          </a:stretch>
+        </p:blipFill>
+        <p:spPr>
+          <a:xfrm>
+            <a:off x="8048320" y="128016"/>
+            <a:ext cx="201168" cy="201168"/>
+          </a:xfrm>
+          <a:prstGeom prst="rect">
+            <a:avLst/>
+          </a:prstGeom>
+        </p:spPr>
+      </p:pic>
+      <p:sp>
+        <p:nvSpPr>
+          <p:cNvPr id="14" name="Text 11"/>
+          <p:cNvSpPr txBox="1"/>
+          <p:nvPr/>
+        </p:nvSpPr>
+        <p:spPr>
+          <a:xfrm>
+            <a:off x="8304352" y="91440"/>
+            <a:ext cx="3302127" cy="274320"/>
+          </a:xfrm>
+          <a:prstGeom prst="rect">
+            <a:avLst/>
+          </a:prstGeom>
+          <a:noFill/>
+          <a:ln/>
+        </p:spPr>
+        <p:txBody>
+          <a:bodyPr wrap="square" lIns="0" tIns="0" rIns="0" bIns="0" rtlCol="0" anchor="ctr"/>
+          <a:lstStyle/>
+          <a:p>
+            <a:pPr indent="0" marL="0">
+              <a:buNone/>
+            </a:pPr>
+            <a:r>
+              <a:rPr lang="en-US" sz="1100" b="1" dirty="0">
+                <a:solidFill>
+                  <a:srgbClr val="075985"/>
+                </a:solidFill>
+                <a:latin typeface="Calibri" pitchFamily="34" charset="0"/>
+                <a:ea typeface="Calibri" pitchFamily="34" charset="-122"/>
+                <a:cs typeface="Calibri" pitchFamily="34" charset="-120"/>
+              </a:rPr>
+              <a:t>DA COMPRENDERE OGGI</a:t>
+            </a:r>
+            <a:pPr indent="0" marL="0">
+              <a:buNone/>
+            </a:pPr>
+            <a:r>
+              <a:rPr lang="en-US" sz="1100" dirty="0">
+                <a:solidFill>
+                  <a:srgbClr val="075985"/>
+                </a:solidFill>
+                <a:latin typeface="Calibri" pitchFamily="34" charset="0"/>
+                <a:ea typeface="Calibri" pitchFamily="34" charset="-122"/>
+                <a:cs typeface="Calibri" pitchFamily="34" charset="-120"/>
+              </a:rPr>
+              <a:t> · gli array in memoria</a:t>
+            </a:r>
+            <a:endParaRPr lang="en-US" sz="1100" dirty="0"/>
+          </a:p>
+        </p:txBody>
+      </p:sp>
+      <p:sp>
+        <p:nvSpPr>
           <p:cNvPr id="25" name="Slide Number Placeholder 0"/>
           <p:cNvSpPr>
             <a:spLocks noGrp="1"/>
@@ -11302,6 +12379,133 @@
       </p:sp>
       <p:sp>
         <p:nvSpPr>
+          <p:cNvPr id="14" name="Shape 12"/>
+          <p:cNvSpPr/>
+          <p:nvPr/>
+        </p:nvSpPr>
+        <p:spPr>
+          <a:xfrm>
+            <a:off x="7526350" y="91440"/>
+            <a:ext cx="4116705" cy="274320"/>
+          </a:xfrm>
+          <a:prstGeom prst="rect">
+            <a:avLst/>
+          </a:prstGeom>
+          <a:solidFill>
+            <a:srgbClr val="E0F2FE"/>
+          </a:solidFill>
+          <a:ln w="12700">
+            <a:solidFill>
+              <a:srgbClr val="0369A1"/>
+            </a:solidFill>
+            <a:prstDash val="solid"/>
+          </a:ln>
+        </p:spPr>
+      </p:sp>
+      <p:sp>
+        <p:nvSpPr>
+          <p:cNvPr id="15" name="Shape 13"/>
+          <p:cNvSpPr/>
+          <p:nvPr/>
+        </p:nvSpPr>
+        <p:spPr>
+          <a:xfrm>
+            <a:off x="7526350" y="91440"/>
+            <a:ext cx="73152" cy="274320"/>
+          </a:xfrm>
+          <a:prstGeom prst="rect">
+            <a:avLst/>
+          </a:prstGeom>
+          <a:solidFill>
+            <a:srgbClr val="0369A1"/>
+          </a:solidFill>
+          <a:ln w="12700">
+            <a:solidFill>
+              <a:srgbClr val="0369A1"/>
+            </a:solidFill>
+            <a:prstDash val="solid"/>
+          </a:ln>
+        </p:spPr>
+      </p:sp>
+      <p:pic>
+        <p:nvPicPr>
+          <p:cNvPr id="16" name="Image 0" descr="preencoded.png">    </p:cNvPr>
+          <p:cNvPicPr>
+            <a:picLocks noChangeAspect="1"/>
+          </p:cNvPicPr>
+          <p:nvPr/>
+        </p:nvPicPr>
+        <p:blipFill>
+          <a:blip r:embed="rId1"/>
+          <a:stretch>
+            <a:fillRect/>
+          </a:stretch>
+        </p:blipFill>
+        <p:spPr>
+          <a:xfrm>
+            <a:off x="7654366" y="128016"/>
+            <a:ext cx="201168" cy="201168"/>
+          </a:xfrm>
+          <a:prstGeom prst="rect">
+            <a:avLst/>
+          </a:prstGeom>
+        </p:spPr>
+      </p:pic>
+      <p:sp>
+        <p:nvSpPr>
+          <p:cNvPr id="17" name="Text 14"/>
+          <p:cNvSpPr txBox="1"/>
+          <p:nvPr/>
+        </p:nvSpPr>
+        <p:spPr>
+          <a:xfrm>
+            <a:off x="7910398" y="91440"/>
+            <a:ext cx="3696081" cy="274320"/>
+          </a:xfrm>
+          <a:prstGeom prst="rect">
+            <a:avLst/>
+          </a:prstGeom>
+          <a:noFill/>
+          <a:ln/>
+        </p:spPr>
+        <p:txBody>
+          <a:bodyPr wrap="square" lIns="0" tIns="0" rIns="0" bIns="0" rtlCol="0" anchor="ctr"/>
+          <a:lstStyle/>
+          <a:p>
+            <a:pPr indent="0" marL="0">
+              <a:buNone/>
+            </a:pPr>
+            <a:r>
+              <a:rPr lang="en-US" sz="1100" b="1" dirty="0">
+                <a:solidFill>
+                  <a:srgbClr val="075985"/>
+                </a:solidFill>
+                <a:latin typeface="Calibri" pitchFamily="34" charset="0"/>
+                <a:ea typeface="Calibri" pitchFamily="34" charset="-122"/>
+                <a:cs typeface="Calibri" pitchFamily="34" charset="-120"/>
+              </a:rPr>
+              <a:t>DA COMPRENDERE OGGI</a:t>
+            </a:r>
+            <a:pPr indent="0" marL="0">
+              <a:buNone/>
+            </a:pPr>
+            <a:r>
+              <a:rPr lang="en-US" sz="1100" dirty="0">
+                <a:solidFill>
+                  <a:srgbClr val="075985"/>
+                </a:solidFill>
+                <a:latin typeface="Calibri" pitchFamily="34" charset="0"/>
+                <a:ea typeface="Calibri" pitchFamily="34" charset="-122"/>
+                <a:cs typeface="Calibri" pitchFamily="34" charset="-120"/>
+              </a:rPr>
+              <a:t> · la convenzione di chiamata</a:t>
+            </a:r>
+            <a:endParaRPr lang="en-US" sz="1100" dirty="0"/>
+          </a:p>
+        </p:txBody>
+      </p:sp>
+      <p:sp>
+        <p:nvSpPr>
           <p:cNvPr id="25" name="Slide Number Placeholder 0"/>
           <p:cNvSpPr>
             <a:spLocks noGrp="1"/>
@@ -12217,6 +13421,133 @@
       </p:sp>
       <p:sp>
         <p:nvSpPr>
+          <p:cNvPr id="14" name="Shape 12"/>
+          <p:cNvSpPr/>
+          <p:nvPr/>
+        </p:nvSpPr>
+        <p:spPr>
+          <a:xfrm>
+            <a:off x="7723327" y="91440"/>
+            <a:ext cx="3919728" cy="274320"/>
+          </a:xfrm>
+          <a:prstGeom prst="rect">
+            <a:avLst/>
+          </a:prstGeom>
+          <a:solidFill>
+            <a:srgbClr val="E0F2FE"/>
+          </a:solidFill>
+          <a:ln w="12700">
+            <a:solidFill>
+              <a:srgbClr val="0369A1"/>
+            </a:solidFill>
+            <a:prstDash val="solid"/>
+          </a:ln>
+        </p:spPr>
+      </p:sp>
+      <p:sp>
+        <p:nvSpPr>
+          <p:cNvPr id="15" name="Shape 13"/>
+          <p:cNvSpPr/>
+          <p:nvPr/>
+        </p:nvSpPr>
+        <p:spPr>
+          <a:xfrm>
+            <a:off x="7723327" y="91440"/>
+            <a:ext cx="73152" cy="274320"/>
+          </a:xfrm>
+          <a:prstGeom prst="rect">
+            <a:avLst/>
+          </a:prstGeom>
+          <a:solidFill>
+            <a:srgbClr val="0369A1"/>
+          </a:solidFill>
+          <a:ln w="12700">
+            <a:solidFill>
+              <a:srgbClr val="0369A1"/>
+            </a:solidFill>
+            <a:prstDash val="solid"/>
+          </a:ln>
+        </p:spPr>
+      </p:sp>
+      <p:pic>
+        <p:nvPicPr>
+          <p:cNvPr id="16" name="Image 0" descr="preencoded.png">    </p:cNvPr>
+          <p:cNvPicPr>
+            <a:picLocks noChangeAspect="1"/>
+          </p:cNvPicPr>
+          <p:nvPr/>
+        </p:nvPicPr>
+        <p:blipFill>
+          <a:blip r:embed="rId1"/>
+          <a:stretch>
+            <a:fillRect/>
+          </a:stretch>
+        </p:blipFill>
+        <p:spPr>
+          <a:xfrm>
+            <a:off x="7851343" y="128016"/>
+            <a:ext cx="201168" cy="201168"/>
+          </a:xfrm>
+          <a:prstGeom prst="rect">
+            <a:avLst/>
+          </a:prstGeom>
+        </p:spPr>
+      </p:pic>
+      <p:sp>
+        <p:nvSpPr>
+          <p:cNvPr id="17" name="Text 14"/>
+          <p:cNvSpPr txBox="1"/>
+          <p:nvPr/>
+        </p:nvSpPr>
+        <p:spPr>
+          <a:xfrm>
+            <a:off x="8107375" y="91440"/>
+            <a:ext cx="3499104" cy="274320"/>
+          </a:xfrm>
+          <a:prstGeom prst="rect">
+            <a:avLst/>
+          </a:prstGeom>
+          <a:noFill/>
+          <a:ln/>
+        </p:spPr>
+        <p:txBody>
+          <a:bodyPr wrap="square" lIns="0" tIns="0" rIns="0" bIns="0" rtlCol="0" anchor="ctr"/>
+          <a:lstStyle/>
+          <a:p>
+            <a:pPr indent="0" marL="0">
+              <a:buNone/>
+            </a:pPr>
+            <a:r>
+              <a:rPr lang="en-US" sz="1100" b="1" dirty="0">
+                <a:solidFill>
+                  <a:srgbClr val="075985"/>
+                </a:solidFill>
+                <a:latin typeface="Calibri" pitchFamily="34" charset="0"/>
+                <a:ea typeface="Calibri" pitchFamily="34" charset="-122"/>
+                <a:cs typeface="Calibri" pitchFamily="34" charset="-120"/>
+              </a:rPr>
+              <a:t>DA COMPRENDERE OGGI</a:t>
+            </a:r>
+            <a:pPr indent="0" marL="0">
+              <a:buNone/>
+            </a:pPr>
+            <a:r>
+              <a:rPr lang="en-US" sz="1100" dirty="0">
+                <a:solidFill>
+                  <a:srgbClr val="075985"/>
+                </a:solidFill>
+                <a:latin typeface="Calibri" pitchFamily="34" charset="0"/>
+                <a:ea typeface="Calibri" pitchFamily="34" charset="-122"/>
+                <a:cs typeface="Calibri" pitchFamily="34" charset="-120"/>
+              </a:rPr>
+              <a:t> · macchine a stati finiti</a:t>
+            </a:r>
+            <a:endParaRPr lang="en-US" sz="1100" dirty="0"/>
+          </a:p>
+        </p:txBody>
+      </p:sp>
+      <p:sp>
+        <p:nvSpPr>
           <p:cNvPr id="25" name="Slide Number Placeholder 0"/>
           <p:cNvSpPr>
             <a:spLocks noGrp="1"/>
@@ -13751,6 +15082,133 @@
       </p:sp>
       <p:sp>
         <p:nvSpPr>
+          <p:cNvPr id="17" name="Shape 15"/>
+          <p:cNvSpPr/>
+          <p:nvPr/>
+        </p:nvSpPr>
+        <p:spPr>
+          <a:xfrm>
+            <a:off x="8248599" y="91440"/>
+            <a:ext cx="3394456" cy="274320"/>
+          </a:xfrm>
+          <a:prstGeom prst="rect">
+            <a:avLst/>
+          </a:prstGeom>
+          <a:solidFill>
+            <a:srgbClr val="E0F2FE"/>
+          </a:solidFill>
+          <a:ln w="12700">
+            <a:solidFill>
+              <a:srgbClr val="0369A1"/>
+            </a:solidFill>
+            <a:prstDash val="solid"/>
+          </a:ln>
+        </p:spPr>
+      </p:sp>
+      <p:sp>
+        <p:nvSpPr>
+          <p:cNvPr id="18" name="Shape 16"/>
+          <p:cNvSpPr/>
+          <p:nvPr/>
+        </p:nvSpPr>
+        <p:spPr>
+          <a:xfrm>
+            <a:off x="8248599" y="91440"/>
+            <a:ext cx="73152" cy="274320"/>
+          </a:xfrm>
+          <a:prstGeom prst="rect">
+            <a:avLst/>
+          </a:prstGeom>
+          <a:solidFill>
+            <a:srgbClr val="0369A1"/>
+          </a:solidFill>
+          <a:ln w="12700">
+            <a:solidFill>
+              <a:srgbClr val="0369A1"/>
+            </a:solidFill>
+            <a:prstDash val="solid"/>
+          </a:ln>
+        </p:spPr>
+      </p:sp>
+      <p:pic>
+        <p:nvPicPr>
+          <p:cNvPr id="19" name="Image 0" descr="preencoded.png">    </p:cNvPr>
+          <p:cNvPicPr>
+            <a:picLocks noChangeAspect="1"/>
+          </p:cNvPicPr>
+          <p:nvPr/>
+        </p:nvPicPr>
+        <p:blipFill>
+          <a:blip r:embed="rId1"/>
+          <a:stretch>
+            <a:fillRect/>
+          </a:stretch>
+        </p:blipFill>
+        <p:spPr>
+          <a:xfrm>
+            <a:off x="8376615" y="128016"/>
+            <a:ext cx="201168" cy="201168"/>
+          </a:xfrm>
+          <a:prstGeom prst="rect">
+            <a:avLst/>
+          </a:prstGeom>
+        </p:spPr>
+      </p:pic>
+      <p:sp>
+        <p:nvSpPr>
+          <p:cNvPr id="20" name="Text 17"/>
+          <p:cNvSpPr txBox="1"/>
+          <p:nvPr/>
+        </p:nvSpPr>
+        <p:spPr>
+          <a:xfrm>
+            <a:off x="8632647" y="91440"/>
+            <a:ext cx="2973832" cy="274320"/>
+          </a:xfrm>
+          <a:prstGeom prst="rect">
+            <a:avLst/>
+          </a:prstGeom>
+          <a:noFill/>
+          <a:ln/>
+        </p:spPr>
+        <p:txBody>
+          <a:bodyPr wrap="square" lIns="0" tIns="0" rIns="0" bIns="0" rtlCol="0" anchor="ctr"/>
+          <a:lstStyle/>
+          <a:p>
+            <a:pPr indent="0" marL="0">
+              <a:buNone/>
+            </a:pPr>
+            <a:r>
+              <a:rPr lang="en-US" sz="1100" b="1" dirty="0">
+                <a:solidFill>
+                  <a:srgbClr val="075985"/>
+                </a:solidFill>
+                <a:latin typeface="Calibri" pitchFamily="34" charset="0"/>
+                <a:ea typeface="Calibri" pitchFamily="34" charset="-122"/>
+                <a:cs typeface="Calibri" pitchFamily="34" charset="-120"/>
+              </a:rPr>
+              <a:t>DA COMPRENDERE OGGI</a:t>
+            </a:r>
+            <a:pPr indent="0" marL="0">
+              <a:buNone/>
+            </a:pPr>
+            <a:r>
+              <a:rPr lang="en-US" sz="1100" dirty="0">
+                <a:solidFill>
+                  <a:srgbClr val="075985"/>
+                </a:solidFill>
+                <a:latin typeface="Calibri" pitchFamily="34" charset="0"/>
+                <a:ea typeface="Calibri" pitchFamily="34" charset="-122"/>
+                <a:cs typeface="Calibri" pitchFamily="34" charset="-120"/>
+              </a:rPr>
+              <a:t> · il frame buffer</a:t>
+            </a:r>
+            <a:endParaRPr lang="en-US" sz="1100" dirty="0"/>
+          </a:p>
+        </p:txBody>
+      </p:sp>
+      <p:sp>
+        <p:nvSpPr>
           <p:cNvPr id="25" name="Slide Number Placeholder 0"/>
           <p:cNvSpPr>
             <a:spLocks noGrp="1"/>
@@ -15361,6 +16819,133 @@
       </p:sp>
       <p:sp>
         <p:nvSpPr>
+          <p:cNvPr id="17" name="Shape 15"/>
+          <p:cNvSpPr/>
+          <p:nvPr/>
+        </p:nvSpPr>
+        <p:spPr>
+          <a:xfrm>
+            <a:off x="8248599" y="91440"/>
+            <a:ext cx="3394456" cy="274320"/>
+          </a:xfrm>
+          <a:prstGeom prst="rect">
+            <a:avLst/>
+          </a:prstGeom>
+          <a:solidFill>
+            <a:srgbClr val="E0F2FE"/>
+          </a:solidFill>
+          <a:ln w="12700">
+            <a:solidFill>
+              <a:srgbClr val="0369A1"/>
+            </a:solidFill>
+            <a:prstDash val="solid"/>
+          </a:ln>
+        </p:spPr>
+      </p:sp>
+      <p:sp>
+        <p:nvSpPr>
+          <p:cNvPr id="18" name="Shape 16"/>
+          <p:cNvSpPr/>
+          <p:nvPr/>
+        </p:nvSpPr>
+        <p:spPr>
+          <a:xfrm>
+            <a:off x="8248599" y="91440"/>
+            <a:ext cx="73152" cy="274320"/>
+          </a:xfrm>
+          <a:prstGeom prst="rect">
+            <a:avLst/>
+          </a:prstGeom>
+          <a:solidFill>
+            <a:srgbClr val="0369A1"/>
+          </a:solidFill>
+          <a:ln w="12700">
+            <a:solidFill>
+              <a:srgbClr val="0369A1"/>
+            </a:solidFill>
+            <a:prstDash val="solid"/>
+          </a:ln>
+        </p:spPr>
+      </p:sp>
+      <p:pic>
+        <p:nvPicPr>
+          <p:cNvPr id="19" name="Image 0" descr="preencoded.png">    </p:cNvPr>
+          <p:cNvPicPr>
+            <a:picLocks noChangeAspect="1"/>
+          </p:cNvPicPr>
+          <p:nvPr/>
+        </p:nvPicPr>
+        <p:blipFill>
+          <a:blip r:embed="rId1"/>
+          <a:stretch>
+            <a:fillRect/>
+          </a:stretch>
+        </p:blipFill>
+        <p:spPr>
+          <a:xfrm>
+            <a:off x="8376615" y="128016"/>
+            <a:ext cx="201168" cy="201168"/>
+          </a:xfrm>
+          <a:prstGeom prst="rect">
+            <a:avLst/>
+          </a:prstGeom>
+        </p:spPr>
+      </p:pic>
+      <p:sp>
+        <p:nvSpPr>
+          <p:cNvPr id="20" name="Text 17"/>
+          <p:cNvSpPr txBox="1"/>
+          <p:nvPr/>
+        </p:nvSpPr>
+        <p:spPr>
+          <a:xfrm>
+            <a:off x="8632647" y="91440"/>
+            <a:ext cx="2973832" cy="274320"/>
+          </a:xfrm>
+          <a:prstGeom prst="rect">
+            <a:avLst/>
+          </a:prstGeom>
+          <a:noFill/>
+          <a:ln/>
+        </p:spPr>
+        <p:txBody>
+          <a:bodyPr wrap="square" lIns="0" tIns="0" rIns="0" bIns="0" rtlCol="0" anchor="ctr"/>
+          <a:lstStyle/>
+          <a:p>
+            <a:pPr indent="0" marL="0">
+              <a:buNone/>
+            </a:pPr>
+            <a:r>
+              <a:rPr lang="en-US" sz="1100" b="1" dirty="0">
+                <a:solidFill>
+                  <a:srgbClr val="075985"/>
+                </a:solidFill>
+                <a:latin typeface="Calibri" pitchFamily="34" charset="0"/>
+                <a:ea typeface="Calibri" pitchFamily="34" charset="-122"/>
+                <a:cs typeface="Calibri" pitchFamily="34" charset="-120"/>
+              </a:rPr>
+              <a:t>DA COMPRENDERE OGGI</a:t>
+            </a:r>
+            <a:pPr indent="0" marL="0">
+              <a:buNone/>
+            </a:pPr>
+            <a:r>
+              <a:rPr lang="en-US" sz="1100" dirty="0">
+                <a:solidFill>
+                  <a:srgbClr val="075985"/>
+                </a:solidFill>
+                <a:latin typeface="Calibri" pitchFamily="34" charset="0"/>
+                <a:ea typeface="Calibri" pitchFamily="34" charset="-122"/>
+                <a:cs typeface="Calibri" pitchFamily="34" charset="-120"/>
+              </a:rPr>
+              <a:t> · il frame buffer</a:t>
+            </a:r>
+            <a:endParaRPr lang="en-US" sz="1100" dirty="0"/>
+          </a:p>
+        </p:txBody>
+      </p:sp>
+      <p:sp>
+        <p:nvSpPr>
           <p:cNvPr id="25" name="Slide Number Placeholder 0"/>
           <p:cNvSpPr>
             <a:spLocks noGrp="1"/>
@@ -16200,6 +17785,133 @@
       </p:sp>
       <p:sp>
         <p:nvSpPr>
+          <p:cNvPr id="14" name="Shape 12"/>
+          <p:cNvSpPr/>
+          <p:nvPr/>
+        </p:nvSpPr>
+        <p:spPr>
+          <a:xfrm>
+            <a:off x="8248599" y="91440"/>
+            <a:ext cx="3394456" cy="274320"/>
+          </a:xfrm>
+          <a:prstGeom prst="rect">
+            <a:avLst/>
+          </a:prstGeom>
+          <a:solidFill>
+            <a:srgbClr val="E0F2FE"/>
+          </a:solidFill>
+          <a:ln w="12700">
+            <a:solidFill>
+              <a:srgbClr val="0369A1"/>
+            </a:solidFill>
+            <a:prstDash val="solid"/>
+          </a:ln>
+        </p:spPr>
+      </p:sp>
+      <p:sp>
+        <p:nvSpPr>
+          <p:cNvPr id="15" name="Shape 13"/>
+          <p:cNvSpPr/>
+          <p:nvPr/>
+        </p:nvSpPr>
+        <p:spPr>
+          <a:xfrm>
+            <a:off x="8248599" y="91440"/>
+            <a:ext cx="73152" cy="274320"/>
+          </a:xfrm>
+          <a:prstGeom prst="rect">
+            <a:avLst/>
+          </a:prstGeom>
+          <a:solidFill>
+            <a:srgbClr val="0369A1"/>
+          </a:solidFill>
+          <a:ln w="12700">
+            <a:solidFill>
+              <a:srgbClr val="0369A1"/>
+            </a:solidFill>
+            <a:prstDash val="solid"/>
+          </a:ln>
+        </p:spPr>
+      </p:sp>
+      <p:pic>
+        <p:nvPicPr>
+          <p:cNvPr id="16" name="Image 0" descr="preencoded.png">    </p:cNvPr>
+          <p:cNvPicPr>
+            <a:picLocks noChangeAspect="1"/>
+          </p:cNvPicPr>
+          <p:nvPr/>
+        </p:nvPicPr>
+        <p:blipFill>
+          <a:blip r:embed="rId1"/>
+          <a:stretch>
+            <a:fillRect/>
+          </a:stretch>
+        </p:blipFill>
+        <p:spPr>
+          <a:xfrm>
+            <a:off x="8376615" y="128016"/>
+            <a:ext cx="201168" cy="201168"/>
+          </a:xfrm>
+          <a:prstGeom prst="rect">
+            <a:avLst/>
+          </a:prstGeom>
+        </p:spPr>
+      </p:pic>
+      <p:sp>
+        <p:nvSpPr>
+          <p:cNvPr id="17" name="Text 14"/>
+          <p:cNvSpPr txBox="1"/>
+          <p:nvPr/>
+        </p:nvSpPr>
+        <p:spPr>
+          <a:xfrm>
+            <a:off x="8632647" y="91440"/>
+            <a:ext cx="2973832" cy="274320"/>
+          </a:xfrm>
+          <a:prstGeom prst="rect">
+            <a:avLst/>
+          </a:prstGeom>
+          <a:noFill/>
+          <a:ln/>
+        </p:spPr>
+        <p:txBody>
+          <a:bodyPr wrap="square" lIns="0" tIns="0" rIns="0" bIns="0" rtlCol="0" anchor="ctr"/>
+          <a:lstStyle/>
+          <a:p>
+            <a:pPr indent="0" marL="0">
+              <a:buNone/>
+            </a:pPr>
+            <a:r>
+              <a:rPr lang="en-US" sz="1100" b="1" dirty="0">
+                <a:solidFill>
+                  <a:srgbClr val="075985"/>
+                </a:solidFill>
+                <a:latin typeface="Calibri" pitchFamily="34" charset="0"/>
+                <a:ea typeface="Calibri" pitchFamily="34" charset="-122"/>
+                <a:cs typeface="Calibri" pitchFamily="34" charset="-120"/>
+              </a:rPr>
+              <a:t>DA COMPRENDERE OGGI</a:t>
+            </a:r>
+            <a:pPr indent="0" marL="0">
+              <a:buNone/>
+            </a:pPr>
+            <a:r>
+              <a:rPr lang="en-US" sz="1100" dirty="0">
+                <a:solidFill>
+                  <a:srgbClr val="075985"/>
+                </a:solidFill>
+                <a:latin typeface="Calibri" pitchFamily="34" charset="0"/>
+                <a:ea typeface="Calibri" pitchFamily="34" charset="-122"/>
+                <a:cs typeface="Calibri" pitchFamily="34" charset="-120"/>
+              </a:rPr>
+              <a:t> · il frame buffer</a:t>
+            </a:r>
+            <a:endParaRPr lang="en-US" sz="1100" dirty="0"/>
+          </a:p>
+        </p:txBody>
+      </p:sp>
+      <p:sp>
+        <p:nvSpPr>
           <p:cNvPr id="25" name="Slide Number Placeholder 0"/>
           <p:cNvSpPr>
             <a:spLocks noGrp="1"/>
@@ -16824,6 +18536,133 @@
       </p:sp>
       <p:sp>
         <p:nvSpPr>
+          <p:cNvPr id="11" name="Shape 9"/>
+          <p:cNvSpPr/>
+          <p:nvPr/>
+        </p:nvSpPr>
+        <p:spPr>
+          <a:xfrm>
+            <a:off x="8248599" y="91440"/>
+            <a:ext cx="3394456" cy="274320"/>
+          </a:xfrm>
+          <a:prstGeom prst="rect">
+            <a:avLst/>
+          </a:prstGeom>
+          <a:solidFill>
+            <a:srgbClr val="E0F2FE"/>
+          </a:solidFill>
+          <a:ln w="12700">
+            <a:solidFill>
+              <a:srgbClr val="0369A1"/>
+            </a:solidFill>
+            <a:prstDash val="solid"/>
+          </a:ln>
+        </p:spPr>
+      </p:sp>
+      <p:sp>
+        <p:nvSpPr>
+          <p:cNvPr id="12" name="Shape 10"/>
+          <p:cNvSpPr/>
+          <p:nvPr/>
+        </p:nvSpPr>
+        <p:spPr>
+          <a:xfrm>
+            <a:off x="8248599" y="91440"/>
+            <a:ext cx="73152" cy="274320"/>
+          </a:xfrm>
+          <a:prstGeom prst="rect">
+            <a:avLst/>
+          </a:prstGeom>
+          <a:solidFill>
+            <a:srgbClr val="0369A1"/>
+          </a:solidFill>
+          <a:ln w="12700">
+            <a:solidFill>
+              <a:srgbClr val="0369A1"/>
+            </a:solidFill>
+            <a:prstDash val="solid"/>
+          </a:ln>
+        </p:spPr>
+      </p:sp>
+      <p:pic>
+        <p:nvPicPr>
+          <p:cNvPr id="13" name="Image 0" descr="preencoded.png">    </p:cNvPr>
+          <p:cNvPicPr>
+            <a:picLocks noChangeAspect="1"/>
+          </p:cNvPicPr>
+          <p:nvPr/>
+        </p:nvPicPr>
+        <p:blipFill>
+          <a:blip r:embed="rId1"/>
+          <a:stretch>
+            <a:fillRect/>
+          </a:stretch>
+        </p:blipFill>
+        <p:spPr>
+          <a:xfrm>
+            <a:off x="8376615" y="128016"/>
+            <a:ext cx="201168" cy="201168"/>
+          </a:xfrm>
+          <a:prstGeom prst="rect">
+            <a:avLst/>
+          </a:prstGeom>
+        </p:spPr>
+      </p:pic>
+      <p:sp>
+        <p:nvSpPr>
+          <p:cNvPr id="14" name="Text 11"/>
+          <p:cNvSpPr txBox="1"/>
+          <p:nvPr/>
+        </p:nvSpPr>
+        <p:spPr>
+          <a:xfrm>
+            <a:off x="8632647" y="91440"/>
+            <a:ext cx="2973832" cy="274320"/>
+          </a:xfrm>
+          <a:prstGeom prst="rect">
+            <a:avLst/>
+          </a:prstGeom>
+          <a:noFill/>
+          <a:ln/>
+        </p:spPr>
+        <p:txBody>
+          <a:bodyPr wrap="square" lIns="0" tIns="0" rIns="0" bIns="0" rtlCol="0" anchor="ctr"/>
+          <a:lstStyle/>
+          <a:p>
+            <a:pPr indent="0" marL="0">
+              <a:buNone/>
+            </a:pPr>
+            <a:r>
+              <a:rPr lang="en-US" sz="1100" b="1" dirty="0">
+                <a:solidFill>
+                  <a:srgbClr val="075985"/>
+                </a:solidFill>
+                <a:latin typeface="Calibri" pitchFamily="34" charset="0"/>
+                <a:ea typeface="Calibri" pitchFamily="34" charset="-122"/>
+                <a:cs typeface="Calibri" pitchFamily="34" charset="-120"/>
+              </a:rPr>
+              <a:t>DA COMPRENDERE OGGI</a:t>
+            </a:r>
+            <a:pPr indent="0" marL="0">
+              <a:buNone/>
+            </a:pPr>
+            <a:r>
+              <a:rPr lang="en-US" sz="1100" dirty="0">
+                <a:solidFill>
+                  <a:srgbClr val="075985"/>
+                </a:solidFill>
+                <a:latin typeface="Calibri" pitchFamily="34" charset="0"/>
+                <a:ea typeface="Calibri" pitchFamily="34" charset="-122"/>
+                <a:cs typeface="Calibri" pitchFamily="34" charset="-120"/>
+              </a:rPr>
+              <a:t> · il frame buffer</a:t>
+            </a:r>
+            <a:endParaRPr lang="en-US" sz="1100" dirty="0"/>
+          </a:p>
+        </p:txBody>
+      </p:sp>
+      <p:sp>
+        <p:nvSpPr>
           <p:cNvPr id="25" name="Slide Number Placeholder 0"/>
           <p:cNvSpPr>
             <a:spLocks noGrp="1"/>
@@ -17485,6 +19324,133 @@
       </p:sp>
       <p:sp>
         <p:nvSpPr>
+          <p:cNvPr id="11" name="Shape 9"/>
+          <p:cNvSpPr/>
+          <p:nvPr/>
+        </p:nvSpPr>
+        <p:spPr>
+          <a:xfrm>
+            <a:off x="8248599" y="91440"/>
+            <a:ext cx="3394456" cy="274320"/>
+          </a:xfrm>
+          <a:prstGeom prst="rect">
+            <a:avLst/>
+          </a:prstGeom>
+          <a:solidFill>
+            <a:srgbClr val="E0F2FE"/>
+          </a:solidFill>
+          <a:ln w="12700">
+            <a:solidFill>
+              <a:srgbClr val="0369A1"/>
+            </a:solidFill>
+            <a:prstDash val="solid"/>
+          </a:ln>
+        </p:spPr>
+      </p:sp>
+      <p:sp>
+        <p:nvSpPr>
+          <p:cNvPr id="12" name="Shape 10"/>
+          <p:cNvSpPr/>
+          <p:nvPr/>
+        </p:nvSpPr>
+        <p:spPr>
+          <a:xfrm>
+            <a:off x="8248599" y="91440"/>
+            <a:ext cx="73152" cy="274320"/>
+          </a:xfrm>
+          <a:prstGeom prst="rect">
+            <a:avLst/>
+          </a:prstGeom>
+          <a:solidFill>
+            <a:srgbClr val="0369A1"/>
+          </a:solidFill>
+          <a:ln w="12700">
+            <a:solidFill>
+              <a:srgbClr val="0369A1"/>
+            </a:solidFill>
+            <a:prstDash val="solid"/>
+          </a:ln>
+        </p:spPr>
+      </p:sp>
+      <p:pic>
+        <p:nvPicPr>
+          <p:cNvPr id="13" name="Image 0" descr="preencoded.png">    </p:cNvPr>
+          <p:cNvPicPr>
+            <a:picLocks noChangeAspect="1"/>
+          </p:cNvPicPr>
+          <p:nvPr/>
+        </p:nvPicPr>
+        <p:blipFill>
+          <a:blip r:embed="rId1"/>
+          <a:stretch>
+            <a:fillRect/>
+          </a:stretch>
+        </p:blipFill>
+        <p:spPr>
+          <a:xfrm>
+            <a:off x="8376615" y="128016"/>
+            <a:ext cx="201168" cy="201168"/>
+          </a:xfrm>
+          <a:prstGeom prst="rect">
+            <a:avLst/>
+          </a:prstGeom>
+        </p:spPr>
+      </p:pic>
+      <p:sp>
+        <p:nvSpPr>
+          <p:cNvPr id="14" name="Text 11"/>
+          <p:cNvSpPr txBox="1"/>
+          <p:nvPr/>
+        </p:nvSpPr>
+        <p:spPr>
+          <a:xfrm>
+            <a:off x="8632647" y="91440"/>
+            <a:ext cx="2973832" cy="274320"/>
+          </a:xfrm>
+          <a:prstGeom prst="rect">
+            <a:avLst/>
+          </a:prstGeom>
+          <a:noFill/>
+          <a:ln/>
+        </p:spPr>
+        <p:txBody>
+          <a:bodyPr wrap="square" lIns="0" tIns="0" rIns="0" bIns="0" rtlCol="0" anchor="ctr"/>
+          <a:lstStyle/>
+          <a:p>
+            <a:pPr indent="0" marL="0">
+              <a:buNone/>
+            </a:pPr>
+            <a:r>
+              <a:rPr lang="en-US" sz="1100" b="1" dirty="0">
+                <a:solidFill>
+                  <a:srgbClr val="075985"/>
+                </a:solidFill>
+                <a:latin typeface="Calibri" pitchFamily="34" charset="0"/>
+                <a:ea typeface="Calibri" pitchFamily="34" charset="-122"/>
+                <a:cs typeface="Calibri" pitchFamily="34" charset="-120"/>
+              </a:rPr>
+              <a:t>DA COMPRENDERE OGGI</a:t>
+            </a:r>
+            <a:pPr indent="0" marL="0">
+              <a:buNone/>
+            </a:pPr>
+            <a:r>
+              <a:rPr lang="en-US" sz="1100" dirty="0">
+                <a:solidFill>
+                  <a:srgbClr val="075985"/>
+                </a:solidFill>
+                <a:latin typeface="Calibri" pitchFamily="34" charset="0"/>
+                <a:ea typeface="Calibri" pitchFamily="34" charset="-122"/>
+                <a:cs typeface="Calibri" pitchFamily="34" charset="-120"/>
+              </a:rPr>
+              <a:t> · il frame buffer</a:t>
+            </a:r>
+            <a:endParaRPr lang="en-US" sz="1100" dirty="0"/>
+          </a:p>
+        </p:txBody>
+      </p:sp>
+      <p:sp>
+        <p:nvSpPr>
           <p:cNvPr id="25" name="Slide Number Placeholder 0"/>
           <p:cNvSpPr>
             <a:spLocks noGrp="1"/>
@@ -18078,6 +20044,133 @@
       </p:sp>
       <p:sp>
         <p:nvSpPr>
+          <p:cNvPr id="11" name="Shape 9"/>
+          <p:cNvSpPr/>
+          <p:nvPr/>
+        </p:nvSpPr>
+        <p:spPr>
+          <a:xfrm>
+            <a:off x="8248599" y="91440"/>
+            <a:ext cx="3394456" cy="274320"/>
+          </a:xfrm>
+          <a:prstGeom prst="rect">
+            <a:avLst/>
+          </a:prstGeom>
+          <a:solidFill>
+            <a:srgbClr val="E0F2FE"/>
+          </a:solidFill>
+          <a:ln w="12700">
+            <a:solidFill>
+              <a:srgbClr val="0369A1"/>
+            </a:solidFill>
+            <a:prstDash val="solid"/>
+          </a:ln>
+        </p:spPr>
+      </p:sp>
+      <p:sp>
+        <p:nvSpPr>
+          <p:cNvPr id="12" name="Shape 10"/>
+          <p:cNvSpPr/>
+          <p:nvPr/>
+        </p:nvSpPr>
+        <p:spPr>
+          <a:xfrm>
+            <a:off x="8248599" y="91440"/>
+            <a:ext cx="73152" cy="274320"/>
+          </a:xfrm>
+          <a:prstGeom prst="rect">
+            <a:avLst/>
+          </a:prstGeom>
+          <a:solidFill>
+            <a:srgbClr val="0369A1"/>
+          </a:solidFill>
+          <a:ln w="12700">
+            <a:solidFill>
+              <a:srgbClr val="0369A1"/>
+            </a:solidFill>
+            <a:prstDash val="solid"/>
+          </a:ln>
+        </p:spPr>
+      </p:sp>
+      <p:pic>
+        <p:nvPicPr>
+          <p:cNvPr id="13" name="Image 0" descr="preencoded.png">    </p:cNvPr>
+          <p:cNvPicPr>
+            <a:picLocks noChangeAspect="1"/>
+          </p:cNvPicPr>
+          <p:nvPr/>
+        </p:nvPicPr>
+        <p:blipFill>
+          <a:blip r:embed="rId1"/>
+          <a:stretch>
+            <a:fillRect/>
+          </a:stretch>
+        </p:blipFill>
+        <p:spPr>
+          <a:xfrm>
+            <a:off x="8376615" y="128016"/>
+            <a:ext cx="201168" cy="201168"/>
+          </a:xfrm>
+          <a:prstGeom prst="rect">
+            <a:avLst/>
+          </a:prstGeom>
+        </p:spPr>
+      </p:pic>
+      <p:sp>
+        <p:nvSpPr>
+          <p:cNvPr id="14" name="Text 11"/>
+          <p:cNvSpPr txBox="1"/>
+          <p:nvPr/>
+        </p:nvSpPr>
+        <p:spPr>
+          <a:xfrm>
+            <a:off x="8632647" y="91440"/>
+            <a:ext cx="2973832" cy="274320"/>
+          </a:xfrm>
+          <a:prstGeom prst="rect">
+            <a:avLst/>
+          </a:prstGeom>
+          <a:noFill/>
+          <a:ln/>
+        </p:spPr>
+        <p:txBody>
+          <a:bodyPr wrap="square" lIns="0" tIns="0" rIns="0" bIns="0" rtlCol="0" anchor="ctr"/>
+          <a:lstStyle/>
+          <a:p>
+            <a:pPr indent="0" marL="0">
+              <a:buNone/>
+            </a:pPr>
+            <a:r>
+              <a:rPr lang="en-US" sz="1100" b="1" dirty="0">
+                <a:solidFill>
+                  <a:srgbClr val="075985"/>
+                </a:solidFill>
+                <a:latin typeface="Calibri" pitchFamily="34" charset="0"/>
+                <a:ea typeface="Calibri" pitchFamily="34" charset="-122"/>
+                <a:cs typeface="Calibri" pitchFamily="34" charset="-120"/>
+              </a:rPr>
+              <a:t>DA COMPRENDERE OGGI</a:t>
+            </a:r>
+            <a:pPr indent="0" marL="0">
+              <a:buNone/>
+            </a:pPr>
+            <a:r>
+              <a:rPr lang="en-US" sz="1100" dirty="0">
+                <a:solidFill>
+                  <a:srgbClr val="075985"/>
+                </a:solidFill>
+                <a:latin typeface="Calibri" pitchFamily="34" charset="0"/>
+                <a:ea typeface="Calibri" pitchFamily="34" charset="-122"/>
+                <a:cs typeface="Calibri" pitchFamily="34" charset="-120"/>
+              </a:rPr>
+              <a:t> · il frame buffer</a:t>
+            </a:r>
+            <a:endParaRPr lang="en-US" sz="1100" dirty="0"/>
+          </a:p>
+        </p:txBody>
+      </p:sp>
+      <p:sp>
+        <p:nvSpPr>
           <p:cNvPr id="25" name="Slide Number Placeholder 0"/>
           <p:cNvSpPr>
             <a:spLocks noGrp="1"/>
@@ -19063,6 +21156,133 @@
       </p:sp>
       <p:sp>
         <p:nvSpPr>
+          <p:cNvPr id="8" name="Shape 6"/>
+          <p:cNvSpPr/>
+          <p:nvPr/>
+        </p:nvSpPr>
+        <p:spPr>
+          <a:xfrm>
+            <a:off x="7723327" y="91440"/>
+            <a:ext cx="3919728" cy="274320"/>
+          </a:xfrm>
+          <a:prstGeom prst="rect">
+            <a:avLst/>
+          </a:prstGeom>
+          <a:solidFill>
+            <a:srgbClr val="E0F2FE"/>
+          </a:solidFill>
+          <a:ln w="12700">
+            <a:solidFill>
+              <a:srgbClr val="0369A1"/>
+            </a:solidFill>
+            <a:prstDash val="solid"/>
+          </a:ln>
+        </p:spPr>
+      </p:sp>
+      <p:sp>
+        <p:nvSpPr>
+          <p:cNvPr id="9" name="Shape 7"/>
+          <p:cNvSpPr/>
+          <p:nvPr/>
+        </p:nvSpPr>
+        <p:spPr>
+          <a:xfrm>
+            <a:off x="7723327" y="91440"/>
+            <a:ext cx="73152" cy="274320"/>
+          </a:xfrm>
+          <a:prstGeom prst="rect">
+            <a:avLst/>
+          </a:prstGeom>
+          <a:solidFill>
+            <a:srgbClr val="0369A1"/>
+          </a:solidFill>
+          <a:ln w="12700">
+            <a:solidFill>
+              <a:srgbClr val="0369A1"/>
+            </a:solidFill>
+            <a:prstDash val="solid"/>
+          </a:ln>
+        </p:spPr>
+      </p:sp>
+      <p:pic>
+        <p:nvPicPr>
+          <p:cNvPr id="10" name="Image 0" descr="preencoded.png">    </p:cNvPr>
+          <p:cNvPicPr>
+            <a:picLocks noChangeAspect="1"/>
+          </p:cNvPicPr>
+          <p:nvPr/>
+        </p:nvPicPr>
+        <p:blipFill>
+          <a:blip r:embed="rId1"/>
+          <a:stretch>
+            <a:fillRect/>
+          </a:stretch>
+        </p:blipFill>
+        <p:spPr>
+          <a:xfrm>
+            <a:off x="7851343" y="128016"/>
+            <a:ext cx="201168" cy="201168"/>
+          </a:xfrm>
+          <a:prstGeom prst="rect">
+            <a:avLst/>
+          </a:prstGeom>
+        </p:spPr>
+      </p:pic>
+      <p:sp>
+        <p:nvSpPr>
+          <p:cNvPr id="11" name="Text 8"/>
+          <p:cNvSpPr txBox="1"/>
+          <p:nvPr/>
+        </p:nvSpPr>
+        <p:spPr>
+          <a:xfrm>
+            <a:off x="8107375" y="91440"/>
+            <a:ext cx="3499104" cy="274320"/>
+          </a:xfrm>
+          <a:prstGeom prst="rect">
+            <a:avLst/>
+          </a:prstGeom>
+          <a:noFill/>
+          <a:ln/>
+        </p:spPr>
+        <p:txBody>
+          <a:bodyPr wrap="square" lIns="0" tIns="0" rIns="0" bIns="0" rtlCol="0" anchor="ctr"/>
+          <a:lstStyle/>
+          <a:p>
+            <a:pPr indent="0" marL="0">
+              <a:buNone/>
+            </a:pPr>
+            <a:r>
+              <a:rPr lang="en-US" sz="1100" b="1" dirty="0">
+                <a:solidFill>
+                  <a:srgbClr val="075985"/>
+                </a:solidFill>
+                <a:latin typeface="Calibri" pitchFamily="34" charset="0"/>
+                <a:ea typeface="Calibri" pitchFamily="34" charset="-122"/>
+                <a:cs typeface="Calibri" pitchFamily="34" charset="-120"/>
+              </a:rPr>
+              <a:t>DA COMPRENDERE OGGI</a:t>
+            </a:r>
+            <a:pPr indent="0" marL="0">
+              <a:buNone/>
+            </a:pPr>
+            <a:r>
+              <a:rPr lang="en-US" sz="1100" dirty="0">
+                <a:solidFill>
+                  <a:srgbClr val="075985"/>
+                </a:solidFill>
+                <a:latin typeface="Calibri" pitchFamily="34" charset="0"/>
+                <a:ea typeface="Calibri" pitchFamily="34" charset="-122"/>
+                <a:cs typeface="Calibri" pitchFamily="34" charset="-120"/>
+              </a:rPr>
+              <a:t> · macchine a stati finiti</a:t>
+            </a:r>
+            <a:endParaRPr lang="en-US" sz="1100" dirty="0"/>
+          </a:p>
+        </p:txBody>
+      </p:sp>
+      <p:sp>
+        <p:nvSpPr>
           <p:cNvPr id="25" name="Slide Number Placeholder 0"/>
           <p:cNvSpPr>
             <a:spLocks noGrp="1"/>
@@ -19947,6 +22167,133 @@
       </p:sp>
       <p:sp>
         <p:nvSpPr>
+          <p:cNvPr id="11" name="Shape 9"/>
+          <p:cNvSpPr/>
+          <p:nvPr/>
+        </p:nvSpPr>
+        <p:spPr>
+          <a:xfrm>
+            <a:off x="7723327" y="91440"/>
+            <a:ext cx="3919728" cy="274320"/>
+          </a:xfrm>
+          <a:prstGeom prst="rect">
+            <a:avLst/>
+          </a:prstGeom>
+          <a:solidFill>
+            <a:srgbClr val="E0F2FE"/>
+          </a:solidFill>
+          <a:ln w="12700">
+            <a:solidFill>
+              <a:srgbClr val="0369A1"/>
+            </a:solidFill>
+            <a:prstDash val="solid"/>
+          </a:ln>
+        </p:spPr>
+      </p:sp>
+      <p:sp>
+        <p:nvSpPr>
+          <p:cNvPr id="12" name="Shape 10"/>
+          <p:cNvSpPr/>
+          <p:nvPr/>
+        </p:nvSpPr>
+        <p:spPr>
+          <a:xfrm>
+            <a:off x="7723327" y="91440"/>
+            <a:ext cx="73152" cy="274320"/>
+          </a:xfrm>
+          <a:prstGeom prst="rect">
+            <a:avLst/>
+          </a:prstGeom>
+          <a:solidFill>
+            <a:srgbClr val="0369A1"/>
+          </a:solidFill>
+          <a:ln w="12700">
+            <a:solidFill>
+              <a:srgbClr val="0369A1"/>
+            </a:solidFill>
+            <a:prstDash val="solid"/>
+          </a:ln>
+        </p:spPr>
+      </p:sp>
+      <p:pic>
+        <p:nvPicPr>
+          <p:cNvPr id="13" name="Image 0" descr="preencoded.png">    </p:cNvPr>
+          <p:cNvPicPr>
+            <a:picLocks noChangeAspect="1"/>
+          </p:cNvPicPr>
+          <p:nvPr/>
+        </p:nvPicPr>
+        <p:blipFill>
+          <a:blip r:embed="rId1"/>
+          <a:stretch>
+            <a:fillRect/>
+          </a:stretch>
+        </p:blipFill>
+        <p:spPr>
+          <a:xfrm>
+            <a:off x="7851343" y="128016"/>
+            <a:ext cx="201168" cy="201168"/>
+          </a:xfrm>
+          <a:prstGeom prst="rect">
+            <a:avLst/>
+          </a:prstGeom>
+        </p:spPr>
+      </p:pic>
+      <p:sp>
+        <p:nvSpPr>
+          <p:cNvPr id="14" name="Text 11"/>
+          <p:cNvSpPr txBox="1"/>
+          <p:nvPr/>
+        </p:nvSpPr>
+        <p:spPr>
+          <a:xfrm>
+            <a:off x="8107375" y="91440"/>
+            <a:ext cx="3499104" cy="274320"/>
+          </a:xfrm>
+          <a:prstGeom prst="rect">
+            <a:avLst/>
+          </a:prstGeom>
+          <a:noFill/>
+          <a:ln/>
+        </p:spPr>
+        <p:txBody>
+          <a:bodyPr wrap="square" lIns="0" tIns="0" rIns="0" bIns="0" rtlCol="0" anchor="ctr"/>
+          <a:lstStyle/>
+          <a:p>
+            <a:pPr indent="0" marL="0">
+              <a:buNone/>
+            </a:pPr>
+            <a:r>
+              <a:rPr lang="en-US" sz="1100" b="1" dirty="0">
+                <a:solidFill>
+                  <a:srgbClr val="075985"/>
+                </a:solidFill>
+                <a:latin typeface="Calibri" pitchFamily="34" charset="0"/>
+                <a:ea typeface="Calibri" pitchFamily="34" charset="-122"/>
+                <a:cs typeface="Calibri" pitchFamily="34" charset="-120"/>
+              </a:rPr>
+              <a:t>DA COMPRENDERE OGGI</a:t>
+            </a:r>
+            <a:pPr indent="0" marL="0">
+              <a:buNone/>
+            </a:pPr>
+            <a:r>
+              <a:rPr lang="en-US" sz="1100" dirty="0">
+                <a:solidFill>
+                  <a:srgbClr val="075985"/>
+                </a:solidFill>
+                <a:latin typeface="Calibri" pitchFamily="34" charset="0"/>
+                <a:ea typeface="Calibri" pitchFamily="34" charset="-122"/>
+                <a:cs typeface="Calibri" pitchFamily="34" charset="-120"/>
+              </a:rPr>
+              <a:t> · macchine a stati finiti</a:t>
+            </a:r>
+            <a:endParaRPr lang="en-US" sz="1100" dirty="0"/>
+          </a:p>
+        </p:txBody>
+      </p:sp>
+      <p:sp>
+        <p:nvSpPr>
           <p:cNvPr id="25" name="Slide Number Placeholder 0"/>
           <p:cNvSpPr>
             <a:spLocks noGrp="1"/>
@@ -20772,6 +23119,133 @@
       </p:sp>
       <p:sp>
         <p:nvSpPr>
+          <p:cNvPr id="11" name="Shape 9"/>
+          <p:cNvSpPr/>
+          <p:nvPr/>
+        </p:nvSpPr>
+        <p:spPr>
+          <a:xfrm>
+            <a:off x="7723327" y="91440"/>
+            <a:ext cx="3919728" cy="274320"/>
+          </a:xfrm>
+          <a:prstGeom prst="rect">
+            <a:avLst/>
+          </a:prstGeom>
+          <a:solidFill>
+            <a:srgbClr val="E0F2FE"/>
+          </a:solidFill>
+          <a:ln w="12700">
+            <a:solidFill>
+              <a:srgbClr val="0369A1"/>
+            </a:solidFill>
+            <a:prstDash val="solid"/>
+          </a:ln>
+        </p:spPr>
+      </p:sp>
+      <p:sp>
+        <p:nvSpPr>
+          <p:cNvPr id="12" name="Shape 10"/>
+          <p:cNvSpPr/>
+          <p:nvPr/>
+        </p:nvSpPr>
+        <p:spPr>
+          <a:xfrm>
+            <a:off x="7723327" y="91440"/>
+            <a:ext cx="73152" cy="274320"/>
+          </a:xfrm>
+          <a:prstGeom prst="rect">
+            <a:avLst/>
+          </a:prstGeom>
+          <a:solidFill>
+            <a:srgbClr val="0369A1"/>
+          </a:solidFill>
+          <a:ln w="12700">
+            <a:solidFill>
+              <a:srgbClr val="0369A1"/>
+            </a:solidFill>
+            <a:prstDash val="solid"/>
+          </a:ln>
+        </p:spPr>
+      </p:sp>
+      <p:pic>
+        <p:nvPicPr>
+          <p:cNvPr id="13" name="Image 0" descr="preencoded.png">    </p:cNvPr>
+          <p:cNvPicPr>
+            <a:picLocks noChangeAspect="1"/>
+          </p:cNvPicPr>
+          <p:nvPr/>
+        </p:nvPicPr>
+        <p:blipFill>
+          <a:blip r:embed="rId1"/>
+          <a:stretch>
+            <a:fillRect/>
+          </a:stretch>
+        </p:blipFill>
+        <p:spPr>
+          <a:xfrm>
+            <a:off x="7851343" y="128016"/>
+            <a:ext cx="201168" cy="201168"/>
+          </a:xfrm>
+          <a:prstGeom prst="rect">
+            <a:avLst/>
+          </a:prstGeom>
+        </p:spPr>
+      </p:pic>
+      <p:sp>
+        <p:nvSpPr>
+          <p:cNvPr id="14" name="Text 11"/>
+          <p:cNvSpPr txBox="1"/>
+          <p:nvPr/>
+        </p:nvSpPr>
+        <p:spPr>
+          <a:xfrm>
+            <a:off x="8107375" y="91440"/>
+            <a:ext cx="3499104" cy="274320"/>
+          </a:xfrm>
+          <a:prstGeom prst="rect">
+            <a:avLst/>
+          </a:prstGeom>
+          <a:noFill/>
+          <a:ln/>
+        </p:spPr>
+        <p:txBody>
+          <a:bodyPr wrap="square" lIns="0" tIns="0" rIns="0" bIns="0" rtlCol="0" anchor="ctr"/>
+          <a:lstStyle/>
+          <a:p>
+            <a:pPr indent="0" marL="0">
+              <a:buNone/>
+            </a:pPr>
+            <a:r>
+              <a:rPr lang="en-US" sz="1100" b="1" dirty="0">
+                <a:solidFill>
+                  <a:srgbClr val="075985"/>
+                </a:solidFill>
+                <a:latin typeface="Calibri" pitchFamily="34" charset="0"/>
+                <a:ea typeface="Calibri" pitchFamily="34" charset="-122"/>
+                <a:cs typeface="Calibri" pitchFamily="34" charset="-120"/>
+              </a:rPr>
+              <a:t>DA COMPRENDERE OGGI</a:t>
+            </a:r>
+            <a:pPr indent="0" marL="0">
+              <a:buNone/>
+            </a:pPr>
+            <a:r>
+              <a:rPr lang="en-US" sz="1100" dirty="0">
+                <a:solidFill>
+                  <a:srgbClr val="075985"/>
+                </a:solidFill>
+                <a:latin typeface="Calibri" pitchFamily="34" charset="0"/>
+                <a:ea typeface="Calibri" pitchFamily="34" charset="-122"/>
+                <a:cs typeface="Calibri" pitchFamily="34" charset="-120"/>
+              </a:rPr>
+              <a:t> · macchine a stati finiti</a:t>
+            </a:r>
+            <a:endParaRPr lang="en-US" sz="1100" dirty="0"/>
+          </a:p>
+        </p:txBody>
+      </p:sp>
+      <p:sp>
+        <p:nvSpPr>
           <p:cNvPr id="25" name="Slide Number Placeholder 0"/>
           <p:cNvSpPr>
             <a:spLocks noGrp="1"/>
@@ -21421,6 +23895,158 @@
       </p:sp>
       <p:sp>
         <p:nvSpPr>
+          <p:cNvPr id="5" name="Shape 3"/>
+          <p:cNvSpPr/>
+          <p:nvPr/>
+        </p:nvSpPr>
+        <p:spPr>
+          <a:xfrm>
+            <a:off x="7875600" y="91440"/>
+            <a:ext cx="3767455" cy="274320"/>
+          </a:xfrm>
+          <a:prstGeom prst="rect">
+            <a:avLst/>
+          </a:prstGeom>
+          <a:solidFill>
+            <a:srgbClr val="FEF3C7"/>
+          </a:solidFill>
+          <a:ln w="12700">
+            <a:solidFill>
+              <a:srgbClr val="B45309"/>
+            </a:solidFill>
+            <a:prstDash val="solid"/>
+          </a:ln>
+        </p:spPr>
+      </p:sp>
+      <p:sp>
+        <p:nvSpPr>
+          <p:cNvPr id="6" name="Shape 4"/>
+          <p:cNvSpPr/>
+          <p:nvPr/>
+        </p:nvSpPr>
+        <p:spPr>
+          <a:xfrm>
+            <a:off x="7875600" y="91440"/>
+            <a:ext cx="27432" cy="274320"/>
+          </a:xfrm>
+          <a:prstGeom prst="rect">
+            <a:avLst/>
+          </a:prstGeom>
+          <a:solidFill>
+            <a:srgbClr val="B45309"/>
+          </a:solidFill>
+          <a:ln w="12700">
+            <a:solidFill>
+              <a:srgbClr val="B45309"/>
+            </a:solidFill>
+            <a:prstDash val="solid"/>
+          </a:ln>
+        </p:spPr>
+      </p:sp>
+      <p:sp>
+        <p:nvSpPr>
+          <p:cNvPr id="7" name="Shape 5"/>
+          <p:cNvSpPr/>
+          <p:nvPr/>
+        </p:nvSpPr>
+        <p:spPr>
+          <a:xfrm>
+            <a:off x="7930464" y="91440"/>
+            <a:ext cx="27432" cy="274320"/>
+          </a:xfrm>
+          <a:prstGeom prst="rect">
+            <a:avLst/>
+          </a:prstGeom>
+          <a:solidFill>
+            <a:srgbClr val="B45309"/>
+          </a:solidFill>
+          <a:ln w="12700">
+            <a:solidFill>
+              <a:srgbClr val="B45309"/>
+            </a:solidFill>
+            <a:prstDash val="solid"/>
+          </a:ln>
+        </p:spPr>
+      </p:sp>
+      <p:pic>
+        <p:nvPicPr>
+          <p:cNvPr id="8" name="Image 0" descr="preencoded.png">    </p:cNvPr>
+          <p:cNvPicPr>
+            <a:picLocks noChangeAspect="1"/>
+          </p:cNvPicPr>
+          <p:nvPr/>
+        </p:nvPicPr>
+        <p:blipFill>
+          <a:blip r:embed="rId1"/>
+          <a:stretch>
+            <a:fillRect/>
+          </a:stretch>
+        </p:blipFill>
+        <p:spPr>
+          <a:xfrm>
+            <a:off x="8003616" y="128016"/>
+            <a:ext cx="201168" cy="201168"/>
+          </a:xfrm>
+          <a:prstGeom prst="rect">
+            <a:avLst/>
+          </a:prstGeom>
+        </p:spPr>
+      </p:pic>
+      <p:sp>
+        <p:nvSpPr>
+          <p:cNvPr id="9" name="Text 6"/>
+          <p:cNvSpPr txBox="1"/>
+          <p:nvPr/>
+        </p:nvSpPr>
+        <p:spPr>
+          <a:xfrm>
+            <a:off x="8259648" y="91440"/>
+            <a:ext cx="3346831" cy="274320"/>
+          </a:xfrm>
+          <a:prstGeom prst="rect">
+            <a:avLst/>
+          </a:prstGeom>
+          <a:noFill/>
+          <a:ln/>
+        </p:spPr>
+        <p:txBody>
+          <a:bodyPr wrap="square" lIns="0" tIns="0" rIns="0" bIns="0" rtlCol="0" anchor="ctr"/>
+          <a:lstStyle/>
+          <a:p>
+            <a:pPr indent="0" marL="0">
+              <a:buNone/>
+            </a:pPr>
+            <a:r>
+              <a:rPr lang="en-US" sz="1100" b="1" dirty="0">
+                <a:solidFill>
+                  <a:srgbClr val="92400E"/>
+                </a:solidFill>
+                <a:latin typeface="Calibri" pitchFamily="34" charset="0"/>
+                <a:ea typeface="Calibri" pitchFamily="34" charset="-122"/>
+                <a:cs typeface="Calibri" pitchFamily="34" charset="-120"/>
+              </a:rPr>
+              <a:t>DA UTILIZZARE OGGI</a:t>
+            </a:r>
+            <a:pPr indent="0" marL="0">
+              <a:buNone/>
+            </a:pPr>
+            <a:r>
+              <a:rPr lang="en-US" sz="1100" dirty="0">
+                <a:solidFill>
+                  <a:srgbClr val="92400E"/>
+                </a:solidFill>
+                <a:latin typeface="Calibri" pitchFamily="34" charset="0"/>
+                <a:ea typeface="Calibri" pitchFamily="34" charset="-122"/>
+                <a:cs typeface="Calibri" pitchFamily="34" charset="-120"/>
+              </a:rPr>
+              <a:t> · gli strumenti di PRG32</a:t>
+            </a:r>
+            <a:endParaRPr lang="en-US" sz="1100" dirty="0"/>
+          </a:p>
+        </p:txBody>
+      </p:sp>
+      <p:sp>
+        <p:nvSpPr>
           <p:cNvPr id="25" name="Slide Number Placeholder 0"/>
           <p:cNvSpPr>
             <a:spLocks noGrp="1"/>
@@ -28233,6 +30859,133 @@
       </p:sp>
       <p:sp>
         <p:nvSpPr>
+          <p:cNvPr id="17" name="Shape 15"/>
+          <p:cNvSpPr/>
+          <p:nvPr/>
+        </p:nvSpPr>
+        <p:spPr>
+          <a:xfrm>
+            <a:off x="8117281" y="91440"/>
+            <a:ext cx="3525774" cy="274320"/>
+          </a:xfrm>
+          <a:prstGeom prst="rect">
+            <a:avLst/>
+          </a:prstGeom>
+          <a:solidFill>
+            <a:srgbClr val="E0F2FE"/>
+          </a:solidFill>
+          <a:ln w="12700">
+            <a:solidFill>
+              <a:srgbClr val="0369A1"/>
+            </a:solidFill>
+            <a:prstDash val="solid"/>
+          </a:ln>
+        </p:spPr>
+      </p:sp>
+      <p:sp>
+        <p:nvSpPr>
+          <p:cNvPr id="18" name="Shape 16"/>
+          <p:cNvSpPr/>
+          <p:nvPr/>
+        </p:nvSpPr>
+        <p:spPr>
+          <a:xfrm>
+            <a:off x="8117281" y="91440"/>
+            <a:ext cx="73152" cy="274320"/>
+          </a:xfrm>
+          <a:prstGeom prst="rect">
+            <a:avLst/>
+          </a:prstGeom>
+          <a:solidFill>
+            <a:srgbClr val="0369A1"/>
+          </a:solidFill>
+          <a:ln w="12700">
+            <a:solidFill>
+              <a:srgbClr val="0369A1"/>
+            </a:solidFill>
+            <a:prstDash val="solid"/>
+          </a:ln>
+        </p:spPr>
+      </p:sp>
+      <p:pic>
+        <p:nvPicPr>
+          <p:cNvPr id="19" name="Image 0" descr="preencoded.png">    </p:cNvPr>
+          <p:cNvPicPr>
+            <a:picLocks noChangeAspect="1"/>
+          </p:cNvPicPr>
+          <p:nvPr/>
+        </p:nvPicPr>
+        <p:blipFill>
+          <a:blip r:embed="rId1"/>
+          <a:stretch>
+            <a:fillRect/>
+          </a:stretch>
+        </p:blipFill>
+        <p:spPr>
+          <a:xfrm>
+            <a:off x="8245297" y="128016"/>
+            <a:ext cx="201168" cy="201168"/>
+          </a:xfrm>
+          <a:prstGeom prst="rect">
+            <a:avLst/>
+          </a:prstGeom>
+        </p:spPr>
+      </p:pic>
+      <p:sp>
+        <p:nvSpPr>
+          <p:cNvPr id="20" name="Text 17"/>
+          <p:cNvSpPr txBox="1"/>
+          <p:nvPr/>
+        </p:nvSpPr>
+        <p:spPr>
+          <a:xfrm>
+            <a:off x="8501329" y="91440"/>
+            <a:ext cx="3105150" cy="274320"/>
+          </a:xfrm>
+          <a:prstGeom prst="rect">
+            <a:avLst/>
+          </a:prstGeom>
+          <a:noFill/>
+          <a:ln/>
+        </p:spPr>
+        <p:txBody>
+          <a:bodyPr wrap="square" lIns="0" tIns="0" rIns="0" bIns="0" rtlCol="0" anchor="ctr"/>
+          <a:lstStyle/>
+          <a:p>
+            <a:pPr indent="0" marL="0">
+              <a:buNone/>
+            </a:pPr>
+            <a:r>
+              <a:rPr lang="en-US" sz="1100" b="1" dirty="0">
+                <a:solidFill>
+                  <a:srgbClr val="075985"/>
+                </a:solidFill>
+                <a:latin typeface="Calibri" pitchFamily="34" charset="0"/>
+                <a:ea typeface="Calibri" pitchFamily="34" charset="-122"/>
+                <a:cs typeface="Calibri" pitchFamily="34" charset="-120"/>
+              </a:rPr>
+              <a:t>DA COMPRENDERE OGGI</a:t>
+            </a:r>
+            <a:pPr indent="0" marL="0">
+              <a:buNone/>
+            </a:pPr>
+            <a:r>
+              <a:rPr lang="en-US" sz="1100" dirty="0">
+                <a:solidFill>
+                  <a:srgbClr val="075985"/>
+                </a:solidFill>
+                <a:latin typeface="Calibri" pitchFamily="34" charset="0"/>
+                <a:ea typeface="Calibri" pitchFamily="34" charset="-122"/>
+                <a:cs typeface="Calibri" pitchFamily="34" charset="-120"/>
+              </a:rPr>
+              <a:t> · quoziente e resto</a:t>
+            </a:r>
+            <a:endParaRPr lang="en-US" sz="1100" dirty="0"/>
+          </a:p>
+        </p:txBody>
+      </p:sp>
+      <p:sp>
+        <p:nvSpPr>
           <p:cNvPr id="25" name="Slide Number Placeholder 0"/>
           <p:cNvSpPr>
             <a:spLocks noGrp="1"/>
@@ -29035,6 +31788,158 @@
       </p:sp>
       <p:sp>
         <p:nvSpPr>
+          <p:cNvPr id="17" name="Shape 15"/>
+          <p:cNvSpPr/>
+          <p:nvPr/>
+        </p:nvSpPr>
+        <p:spPr>
+          <a:xfrm>
+            <a:off x="7875600" y="91440"/>
+            <a:ext cx="3767455" cy="274320"/>
+          </a:xfrm>
+          <a:prstGeom prst="rect">
+            <a:avLst/>
+          </a:prstGeom>
+          <a:solidFill>
+            <a:srgbClr val="FEF3C7"/>
+          </a:solidFill>
+          <a:ln w="12700">
+            <a:solidFill>
+              <a:srgbClr val="B45309"/>
+            </a:solidFill>
+            <a:prstDash val="solid"/>
+          </a:ln>
+        </p:spPr>
+      </p:sp>
+      <p:sp>
+        <p:nvSpPr>
+          <p:cNvPr id="18" name="Shape 16"/>
+          <p:cNvSpPr/>
+          <p:nvPr/>
+        </p:nvSpPr>
+        <p:spPr>
+          <a:xfrm>
+            <a:off x="7875600" y="91440"/>
+            <a:ext cx="27432" cy="274320"/>
+          </a:xfrm>
+          <a:prstGeom prst="rect">
+            <a:avLst/>
+          </a:prstGeom>
+          <a:solidFill>
+            <a:srgbClr val="B45309"/>
+          </a:solidFill>
+          <a:ln w="12700">
+            <a:solidFill>
+              <a:srgbClr val="B45309"/>
+            </a:solidFill>
+            <a:prstDash val="solid"/>
+          </a:ln>
+        </p:spPr>
+      </p:sp>
+      <p:sp>
+        <p:nvSpPr>
+          <p:cNvPr id="19" name="Shape 17"/>
+          <p:cNvSpPr/>
+          <p:nvPr/>
+        </p:nvSpPr>
+        <p:spPr>
+          <a:xfrm>
+            <a:off x="7930464" y="91440"/>
+            <a:ext cx="27432" cy="274320"/>
+          </a:xfrm>
+          <a:prstGeom prst="rect">
+            <a:avLst/>
+          </a:prstGeom>
+          <a:solidFill>
+            <a:srgbClr val="B45309"/>
+          </a:solidFill>
+          <a:ln w="12700">
+            <a:solidFill>
+              <a:srgbClr val="B45309"/>
+            </a:solidFill>
+            <a:prstDash val="solid"/>
+          </a:ln>
+        </p:spPr>
+      </p:sp>
+      <p:pic>
+        <p:nvPicPr>
+          <p:cNvPr id="20" name="Image 0" descr="preencoded.png">    </p:cNvPr>
+          <p:cNvPicPr>
+            <a:picLocks noChangeAspect="1"/>
+          </p:cNvPicPr>
+          <p:nvPr/>
+        </p:nvPicPr>
+        <p:blipFill>
+          <a:blip r:embed="rId1"/>
+          <a:stretch>
+            <a:fillRect/>
+          </a:stretch>
+        </p:blipFill>
+        <p:spPr>
+          <a:xfrm>
+            <a:off x="8003616" y="128016"/>
+            <a:ext cx="201168" cy="201168"/>
+          </a:xfrm>
+          <a:prstGeom prst="rect">
+            <a:avLst/>
+          </a:prstGeom>
+        </p:spPr>
+      </p:pic>
+      <p:sp>
+        <p:nvSpPr>
+          <p:cNvPr id="21" name="Text 18"/>
+          <p:cNvSpPr txBox="1"/>
+          <p:nvPr/>
+        </p:nvSpPr>
+        <p:spPr>
+          <a:xfrm>
+            <a:off x="8259648" y="91440"/>
+            <a:ext cx="3346831" cy="274320"/>
+          </a:xfrm>
+          <a:prstGeom prst="rect">
+            <a:avLst/>
+          </a:prstGeom>
+          <a:noFill/>
+          <a:ln/>
+        </p:spPr>
+        <p:txBody>
+          <a:bodyPr wrap="square" lIns="0" tIns="0" rIns="0" bIns="0" rtlCol="0" anchor="ctr"/>
+          <a:lstStyle/>
+          <a:p>
+            <a:pPr indent="0" marL="0">
+              <a:buNone/>
+            </a:pPr>
+            <a:r>
+              <a:rPr lang="en-US" sz="1100" b="1" dirty="0">
+                <a:solidFill>
+                  <a:srgbClr val="92400E"/>
+                </a:solidFill>
+                <a:latin typeface="Calibri" pitchFamily="34" charset="0"/>
+                <a:ea typeface="Calibri" pitchFamily="34" charset="-122"/>
+                <a:cs typeface="Calibri" pitchFamily="34" charset="-120"/>
+              </a:rPr>
+              <a:t>DA UTILIZZARE OGGI</a:t>
+            </a:r>
+            <a:pPr indent="0" marL="0">
+              <a:buNone/>
+            </a:pPr>
+            <a:r>
+              <a:rPr lang="en-US" sz="1100" dirty="0">
+                <a:solidFill>
+                  <a:srgbClr val="92400E"/>
+                </a:solidFill>
+                <a:latin typeface="Calibri" pitchFamily="34" charset="0"/>
+                <a:ea typeface="Calibri" pitchFamily="34" charset="-122"/>
+                <a:cs typeface="Calibri" pitchFamily="34" charset="-120"/>
+              </a:rPr>
+              <a:t> · gli strumenti di PRG32</a:t>
+            </a:r>
+            <a:endParaRPr lang="en-US" sz="1100" dirty="0"/>
+          </a:p>
+        </p:txBody>
+      </p:sp>
+      <p:sp>
+        <p:nvSpPr>
           <p:cNvPr id="25" name="Slide Number Placeholder 0"/>
           <p:cNvSpPr>
             <a:spLocks noGrp="1"/>
@@ -29871,6 +32776,158 @@
       </p:sp>
       <p:sp>
         <p:nvSpPr>
+          <p:cNvPr id="17" name="Shape 15"/>
+          <p:cNvSpPr/>
+          <p:nvPr/>
+        </p:nvSpPr>
+        <p:spPr>
+          <a:xfrm>
+            <a:off x="7875600" y="91440"/>
+            <a:ext cx="3767455" cy="274320"/>
+          </a:xfrm>
+          <a:prstGeom prst="rect">
+            <a:avLst/>
+          </a:prstGeom>
+          <a:solidFill>
+            <a:srgbClr val="FEF3C7"/>
+          </a:solidFill>
+          <a:ln w="12700">
+            <a:solidFill>
+              <a:srgbClr val="B45309"/>
+            </a:solidFill>
+            <a:prstDash val="solid"/>
+          </a:ln>
+        </p:spPr>
+      </p:sp>
+      <p:sp>
+        <p:nvSpPr>
+          <p:cNvPr id="18" name="Shape 16"/>
+          <p:cNvSpPr/>
+          <p:nvPr/>
+        </p:nvSpPr>
+        <p:spPr>
+          <a:xfrm>
+            <a:off x="7875600" y="91440"/>
+            <a:ext cx="27432" cy="274320"/>
+          </a:xfrm>
+          <a:prstGeom prst="rect">
+            <a:avLst/>
+          </a:prstGeom>
+          <a:solidFill>
+            <a:srgbClr val="B45309"/>
+          </a:solidFill>
+          <a:ln w="12700">
+            <a:solidFill>
+              <a:srgbClr val="B45309"/>
+            </a:solidFill>
+            <a:prstDash val="solid"/>
+          </a:ln>
+        </p:spPr>
+      </p:sp>
+      <p:sp>
+        <p:nvSpPr>
+          <p:cNvPr id="19" name="Shape 17"/>
+          <p:cNvSpPr/>
+          <p:nvPr/>
+        </p:nvSpPr>
+        <p:spPr>
+          <a:xfrm>
+            <a:off x="7930464" y="91440"/>
+            <a:ext cx="27432" cy="274320"/>
+          </a:xfrm>
+          <a:prstGeom prst="rect">
+            <a:avLst/>
+          </a:prstGeom>
+          <a:solidFill>
+            <a:srgbClr val="B45309"/>
+          </a:solidFill>
+          <a:ln w="12700">
+            <a:solidFill>
+              <a:srgbClr val="B45309"/>
+            </a:solidFill>
+            <a:prstDash val="solid"/>
+          </a:ln>
+        </p:spPr>
+      </p:sp>
+      <p:pic>
+        <p:nvPicPr>
+          <p:cNvPr id="20" name="Image 0" descr="preencoded.png">    </p:cNvPr>
+          <p:cNvPicPr>
+            <a:picLocks noChangeAspect="1"/>
+          </p:cNvPicPr>
+          <p:nvPr/>
+        </p:nvPicPr>
+        <p:blipFill>
+          <a:blip r:embed="rId1"/>
+          <a:stretch>
+            <a:fillRect/>
+          </a:stretch>
+        </p:blipFill>
+        <p:spPr>
+          <a:xfrm>
+            <a:off x="8003616" y="128016"/>
+            <a:ext cx="201168" cy="201168"/>
+          </a:xfrm>
+          <a:prstGeom prst="rect">
+            <a:avLst/>
+          </a:prstGeom>
+        </p:spPr>
+      </p:pic>
+      <p:sp>
+        <p:nvSpPr>
+          <p:cNvPr id="21" name="Text 18"/>
+          <p:cNvSpPr txBox="1"/>
+          <p:nvPr/>
+        </p:nvSpPr>
+        <p:spPr>
+          <a:xfrm>
+            <a:off x="8259648" y="91440"/>
+            <a:ext cx="3346831" cy="274320"/>
+          </a:xfrm>
+          <a:prstGeom prst="rect">
+            <a:avLst/>
+          </a:prstGeom>
+          <a:noFill/>
+          <a:ln/>
+        </p:spPr>
+        <p:txBody>
+          <a:bodyPr wrap="square" lIns="0" tIns="0" rIns="0" bIns="0" rtlCol="0" anchor="ctr"/>
+          <a:lstStyle/>
+          <a:p>
+            <a:pPr indent="0" marL="0">
+              <a:buNone/>
+            </a:pPr>
+            <a:r>
+              <a:rPr lang="en-US" sz="1100" b="1" dirty="0">
+                <a:solidFill>
+                  <a:srgbClr val="92400E"/>
+                </a:solidFill>
+                <a:latin typeface="Calibri" pitchFamily="34" charset="0"/>
+                <a:ea typeface="Calibri" pitchFamily="34" charset="-122"/>
+                <a:cs typeface="Calibri" pitchFamily="34" charset="-120"/>
+              </a:rPr>
+              <a:t>DA UTILIZZARE OGGI</a:t>
+            </a:r>
+            <a:pPr indent="0" marL="0">
+              <a:buNone/>
+            </a:pPr>
+            <a:r>
+              <a:rPr lang="en-US" sz="1100" dirty="0">
+                <a:solidFill>
+                  <a:srgbClr val="92400E"/>
+                </a:solidFill>
+                <a:latin typeface="Calibri" pitchFamily="34" charset="0"/>
+                <a:ea typeface="Calibri" pitchFamily="34" charset="-122"/>
+                <a:cs typeface="Calibri" pitchFamily="34" charset="-120"/>
+              </a:rPr>
+              <a:t> · gli strumenti di PRG32</a:t>
+            </a:r>
+            <a:endParaRPr lang="en-US" sz="1100" dirty="0"/>
+          </a:p>
+        </p:txBody>
+      </p:sp>
+      <p:sp>
+        <p:nvSpPr>
           <p:cNvPr id="25" name="Slide Number Placeholder 0"/>
           <p:cNvSpPr>
             <a:spLocks noGrp="1"/>
@@ -30700,6 +33757,158 @@
                 <a:cs typeface="Calibri" pitchFamily="34" charset="-120"/>
               </a:rPr>
               <a:t>Schermo nero: confrontate il cablaggio del display con il firmware</a:t>
+            </a:r>
+            <a:endParaRPr lang="en-US" sz="1100" dirty="0"/>
+          </a:p>
+        </p:txBody>
+      </p:sp>
+      <p:sp>
+        <p:nvSpPr>
+          <p:cNvPr id="17" name="Shape 15"/>
+          <p:cNvSpPr/>
+          <p:nvPr/>
+        </p:nvSpPr>
+        <p:spPr>
+          <a:xfrm>
+            <a:off x="7875600" y="91440"/>
+            <a:ext cx="3767455" cy="274320"/>
+          </a:xfrm>
+          <a:prstGeom prst="rect">
+            <a:avLst/>
+          </a:prstGeom>
+          <a:solidFill>
+            <a:srgbClr val="FEF3C7"/>
+          </a:solidFill>
+          <a:ln w="12700">
+            <a:solidFill>
+              <a:srgbClr val="B45309"/>
+            </a:solidFill>
+            <a:prstDash val="solid"/>
+          </a:ln>
+        </p:spPr>
+      </p:sp>
+      <p:sp>
+        <p:nvSpPr>
+          <p:cNvPr id="18" name="Shape 16"/>
+          <p:cNvSpPr/>
+          <p:nvPr/>
+        </p:nvSpPr>
+        <p:spPr>
+          <a:xfrm>
+            <a:off x="7875600" y="91440"/>
+            <a:ext cx="27432" cy="274320"/>
+          </a:xfrm>
+          <a:prstGeom prst="rect">
+            <a:avLst/>
+          </a:prstGeom>
+          <a:solidFill>
+            <a:srgbClr val="B45309"/>
+          </a:solidFill>
+          <a:ln w="12700">
+            <a:solidFill>
+              <a:srgbClr val="B45309"/>
+            </a:solidFill>
+            <a:prstDash val="solid"/>
+          </a:ln>
+        </p:spPr>
+      </p:sp>
+      <p:sp>
+        <p:nvSpPr>
+          <p:cNvPr id="19" name="Shape 17"/>
+          <p:cNvSpPr/>
+          <p:nvPr/>
+        </p:nvSpPr>
+        <p:spPr>
+          <a:xfrm>
+            <a:off x="7930464" y="91440"/>
+            <a:ext cx="27432" cy="274320"/>
+          </a:xfrm>
+          <a:prstGeom prst="rect">
+            <a:avLst/>
+          </a:prstGeom>
+          <a:solidFill>
+            <a:srgbClr val="B45309"/>
+          </a:solidFill>
+          <a:ln w="12700">
+            <a:solidFill>
+              <a:srgbClr val="B45309"/>
+            </a:solidFill>
+            <a:prstDash val="solid"/>
+          </a:ln>
+        </p:spPr>
+      </p:sp>
+      <p:pic>
+        <p:nvPicPr>
+          <p:cNvPr id="20" name="Image 0" descr="preencoded.png">    </p:cNvPr>
+          <p:cNvPicPr>
+            <a:picLocks noChangeAspect="1"/>
+          </p:cNvPicPr>
+          <p:nvPr/>
+        </p:nvPicPr>
+        <p:blipFill>
+          <a:blip r:embed="rId1"/>
+          <a:stretch>
+            <a:fillRect/>
+          </a:stretch>
+        </p:blipFill>
+        <p:spPr>
+          <a:xfrm>
+            <a:off x="8003616" y="128016"/>
+            <a:ext cx="201168" cy="201168"/>
+          </a:xfrm>
+          <a:prstGeom prst="rect">
+            <a:avLst/>
+          </a:prstGeom>
+        </p:spPr>
+      </p:pic>
+      <p:sp>
+        <p:nvSpPr>
+          <p:cNvPr id="21" name="Text 18"/>
+          <p:cNvSpPr txBox="1"/>
+          <p:nvPr/>
+        </p:nvSpPr>
+        <p:spPr>
+          <a:xfrm>
+            <a:off x="8259648" y="91440"/>
+            <a:ext cx="3346831" cy="274320"/>
+          </a:xfrm>
+          <a:prstGeom prst="rect">
+            <a:avLst/>
+          </a:prstGeom>
+          <a:noFill/>
+          <a:ln/>
+        </p:spPr>
+        <p:txBody>
+          <a:bodyPr wrap="square" lIns="0" tIns="0" rIns="0" bIns="0" rtlCol="0" anchor="ctr"/>
+          <a:lstStyle/>
+          <a:p>
+            <a:pPr indent="0" marL="0">
+              <a:buNone/>
+            </a:pPr>
+            <a:r>
+              <a:rPr lang="en-US" sz="1100" b="1" dirty="0">
+                <a:solidFill>
+                  <a:srgbClr val="92400E"/>
+                </a:solidFill>
+                <a:latin typeface="Calibri" pitchFamily="34" charset="0"/>
+                <a:ea typeface="Calibri" pitchFamily="34" charset="-122"/>
+                <a:cs typeface="Calibri" pitchFamily="34" charset="-120"/>
+              </a:rPr>
+              <a:t>DA UTILIZZARE OGGI</a:t>
+            </a:r>
+            <a:pPr indent="0" marL="0">
+              <a:buNone/>
+            </a:pPr>
+            <a:r>
+              <a:rPr lang="en-US" sz="1100" dirty="0">
+                <a:solidFill>
+                  <a:srgbClr val="92400E"/>
+                </a:solidFill>
+                <a:latin typeface="Calibri" pitchFamily="34" charset="0"/>
+                <a:ea typeface="Calibri" pitchFamily="34" charset="-122"/>
+                <a:cs typeface="Calibri" pitchFamily="34" charset="-120"/>
+              </a:rPr>
+              <a:t> · gli strumenti di PRG32</a:t>
             </a:r>
             <a:endParaRPr lang="en-US" sz="1100" dirty="0"/>
           </a:p>
@@ -32088,6 +35297,158 @@
       </p:graphicFrame>
       <p:sp>
         <p:nvSpPr>
+          <p:cNvPr id="4" name="Shape 1"/>
+          <p:cNvSpPr/>
+          <p:nvPr/>
+        </p:nvSpPr>
+        <p:spPr>
+          <a:xfrm>
+            <a:off x="7875600" y="91440"/>
+            <a:ext cx="3767455" cy="274320"/>
+          </a:xfrm>
+          <a:prstGeom prst="rect">
+            <a:avLst/>
+          </a:prstGeom>
+          <a:solidFill>
+            <a:srgbClr val="FEF3C7"/>
+          </a:solidFill>
+          <a:ln w="12700">
+            <a:solidFill>
+              <a:srgbClr val="B45309"/>
+            </a:solidFill>
+            <a:prstDash val="solid"/>
+          </a:ln>
+        </p:spPr>
+      </p:sp>
+      <p:sp>
+        <p:nvSpPr>
+          <p:cNvPr id="5" name="Shape 2"/>
+          <p:cNvSpPr/>
+          <p:nvPr/>
+        </p:nvSpPr>
+        <p:spPr>
+          <a:xfrm>
+            <a:off x="7875600" y="91440"/>
+            <a:ext cx="27432" cy="274320"/>
+          </a:xfrm>
+          <a:prstGeom prst="rect">
+            <a:avLst/>
+          </a:prstGeom>
+          <a:solidFill>
+            <a:srgbClr val="B45309"/>
+          </a:solidFill>
+          <a:ln w="12700">
+            <a:solidFill>
+              <a:srgbClr val="B45309"/>
+            </a:solidFill>
+            <a:prstDash val="solid"/>
+          </a:ln>
+        </p:spPr>
+      </p:sp>
+      <p:sp>
+        <p:nvSpPr>
+          <p:cNvPr id="6" name="Shape 3"/>
+          <p:cNvSpPr/>
+          <p:nvPr/>
+        </p:nvSpPr>
+        <p:spPr>
+          <a:xfrm>
+            <a:off x="7930464" y="91440"/>
+            <a:ext cx="27432" cy="274320"/>
+          </a:xfrm>
+          <a:prstGeom prst="rect">
+            <a:avLst/>
+          </a:prstGeom>
+          <a:solidFill>
+            <a:srgbClr val="B45309"/>
+          </a:solidFill>
+          <a:ln w="12700">
+            <a:solidFill>
+              <a:srgbClr val="B45309"/>
+            </a:solidFill>
+            <a:prstDash val="solid"/>
+          </a:ln>
+        </p:spPr>
+      </p:sp>
+      <p:pic>
+        <p:nvPicPr>
+          <p:cNvPr id="7" name="Image 0" descr="preencoded.png">    </p:cNvPr>
+          <p:cNvPicPr>
+            <a:picLocks noChangeAspect="1"/>
+          </p:cNvPicPr>
+          <p:nvPr/>
+        </p:nvPicPr>
+        <p:blipFill>
+          <a:blip r:embed="rId1"/>
+          <a:stretch>
+            <a:fillRect/>
+          </a:stretch>
+        </p:blipFill>
+        <p:spPr>
+          <a:xfrm>
+            <a:off x="8003616" y="128016"/>
+            <a:ext cx="201168" cy="201168"/>
+          </a:xfrm>
+          <a:prstGeom prst="rect">
+            <a:avLst/>
+          </a:prstGeom>
+        </p:spPr>
+      </p:pic>
+      <p:sp>
+        <p:nvSpPr>
+          <p:cNvPr id="8" name="Text 4"/>
+          <p:cNvSpPr txBox="1"/>
+          <p:nvPr/>
+        </p:nvSpPr>
+        <p:spPr>
+          <a:xfrm>
+            <a:off x="8259648" y="91440"/>
+            <a:ext cx="3346831" cy="274320"/>
+          </a:xfrm>
+          <a:prstGeom prst="rect">
+            <a:avLst/>
+          </a:prstGeom>
+          <a:noFill/>
+          <a:ln/>
+        </p:spPr>
+        <p:txBody>
+          <a:bodyPr wrap="square" lIns="0" tIns="0" rIns="0" bIns="0" rtlCol="0" anchor="ctr"/>
+          <a:lstStyle/>
+          <a:p>
+            <a:pPr indent="0" marL="0">
+              <a:buNone/>
+            </a:pPr>
+            <a:r>
+              <a:rPr lang="en-US" sz="1100" b="1" dirty="0">
+                <a:solidFill>
+                  <a:srgbClr val="92400E"/>
+                </a:solidFill>
+                <a:latin typeface="Calibri" pitchFamily="34" charset="0"/>
+                <a:ea typeface="Calibri" pitchFamily="34" charset="-122"/>
+                <a:cs typeface="Calibri" pitchFamily="34" charset="-120"/>
+              </a:rPr>
+              <a:t>DA UTILIZZARE OGGI</a:t>
+            </a:r>
+            <a:pPr indent="0" marL="0">
+              <a:buNone/>
+            </a:pPr>
+            <a:r>
+              <a:rPr lang="en-US" sz="1100" dirty="0">
+                <a:solidFill>
+                  <a:srgbClr val="92400E"/>
+                </a:solidFill>
+                <a:latin typeface="Calibri" pitchFamily="34" charset="0"/>
+                <a:ea typeface="Calibri" pitchFamily="34" charset="-122"/>
+                <a:cs typeface="Calibri" pitchFamily="34" charset="-120"/>
+              </a:rPr>
+              <a:t> · gli strumenti di PRG32</a:t>
+            </a:r>
+            <a:endParaRPr lang="en-US" sz="1100" dirty="0"/>
+          </a:p>
+        </p:txBody>
+      </p:sp>
+      <p:sp>
+        <p:nvSpPr>
           <p:cNvPr id="25" name="Slide Number Placeholder 0"/>
           <p:cNvSpPr>
             <a:spLocks noGrp="1"/>
@@ -33727,6 +37088,133 @@
       </p:sp>
       <p:sp>
         <p:nvSpPr>
+          <p:cNvPr id="17" name="Shape 15"/>
+          <p:cNvSpPr/>
+          <p:nvPr/>
+        </p:nvSpPr>
+        <p:spPr>
+          <a:xfrm>
+            <a:off x="7920304" y="91440"/>
+            <a:ext cx="3722751" cy="274320"/>
+          </a:xfrm>
+          <a:prstGeom prst="rect">
+            <a:avLst/>
+          </a:prstGeom>
+          <a:solidFill>
+            <a:srgbClr val="E0F2FE"/>
+          </a:solidFill>
+          <a:ln w="12700">
+            <a:solidFill>
+              <a:srgbClr val="0369A1"/>
+            </a:solidFill>
+            <a:prstDash val="solid"/>
+          </a:ln>
+        </p:spPr>
+      </p:sp>
+      <p:sp>
+        <p:nvSpPr>
+          <p:cNvPr id="18" name="Shape 16"/>
+          <p:cNvSpPr/>
+          <p:nvPr/>
+        </p:nvSpPr>
+        <p:spPr>
+          <a:xfrm>
+            <a:off x="7920304" y="91440"/>
+            <a:ext cx="73152" cy="274320"/>
+          </a:xfrm>
+          <a:prstGeom prst="rect">
+            <a:avLst/>
+          </a:prstGeom>
+          <a:solidFill>
+            <a:srgbClr val="0369A1"/>
+          </a:solidFill>
+          <a:ln w="12700">
+            <a:solidFill>
+              <a:srgbClr val="0369A1"/>
+            </a:solidFill>
+            <a:prstDash val="solid"/>
+          </a:ln>
+        </p:spPr>
+      </p:sp>
+      <p:pic>
+        <p:nvPicPr>
+          <p:cNvPr id="19" name="Image 0" descr="preencoded.png">    </p:cNvPr>
+          <p:cNvPicPr>
+            <a:picLocks noChangeAspect="1"/>
+          </p:cNvPicPr>
+          <p:nvPr/>
+        </p:nvPicPr>
+        <p:blipFill>
+          <a:blip r:embed="rId1"/>
+          <a:stretch>
+            <a:fillRect/>
+          </a:stretch>
+        </p:blipFill>
+        <p:spPr>
+          <a:xfrm>
+            <a:off x="8048320" y="128016"/>
+            <a:ext cx="201168" cy="201168"/>
+          </a:xfrm>
+          <a:prstGeom prst="rect">
+            <a:avLst/>
+          </a:prstGeom>
+        </p:spPr>
+      </p:pic>
+      <p:sp>
+        <p:nvSpPr>
+          <p:cNvPr id="20" name="Text 17"/>
+          <p:cNvSpPr txBox="1"/>
+          <p:nvPr/>
+        </p:nvSpPr>
+        <p:spPr>
+          <a:xfrm>
+            <a:off x="8304352" y="91440"/>
+            <a:ext cx="3302127" cy="274320"/>
+          </a:xfrm>
+          <a:prstGeom prst="rect">
+            <a:avLst/>
+          </a:prstGeom>
+          <a:noFill/>
+          <a:ln/>
+        </p:spPr>
+        <p:txBody>
+          <a:bodyPr wrap="square" lIns="0" tIns="0" rIns="0" bIns="0" rtlCol="0" anchor="ctr"/>
+          <a:lstStyle/>
+          <a:p>
+            <a:pPr indent="0" marL="0">
+              <a:buNone/>
+            </a:pPr>
+            <a:r>
+              <a:rPr lang="en-US" sz="1100" b="1" dirty="0">
+                <a:solidFill>
+                  <a:srgbClr val="075985"/>
+                </a:solidFill>
+                <a:latin typeface="Calibri" pitchFamily="34" charset="0"/>
+                <a:ea typeface="Calibri" pitchFamily="34" charset="-122"/>
+                <a:cs typeface="Calibri" pitchFamily="34" charset="-120"/>
+              </a:rPr>
+              <a:t>DA COMPRENDERE OGGI</a:t>
+            </a:r>
+            <a:pPr indent="0" marL="0">
+              <a:buNone/>
+            </a:pPr>
+            <a:r>
+              <a:rPr lang="en-US" sz="1100" dirty="0">
+                <a:solidFill>
+                  <a:srgbClr val="075985"/>
+                </a:solidFill>
+                <a:latin typeface="Calibri" pitchFamily="34" charset="0"/>
+                <a:ea typeface="Calibri" pitchFamily="34" charset="-122"/>
+                <a:cs typeface="Calibri" pitchFamily="34" charset="-120"/>
+              </a:rPr>
+              <a:t> · caratteri e stringhe</a:t>
+            </a:r>
+            <a:endParaRPr lang="en-US" sz="1100" dirty="0"/>
+          </a:p>
+        </p:txBody>
+      </p:sp>
+      <p:sp>
+        <p:nvSpPr>
           <p:cNvPr id="25" name="Slide Number Placeholder 0"/>
           <p:cNvSpPr>
             <a:spLocks noGrp="1"/>
@@ -34774,6 +38262,133 @@
       </p:sp>
       <p:sp>
         <p:nvSpPr>
+          <p:cNvPr id="14" name="Shape 12"/>
+          <p:cNvSpPr/>
+          <p:nvPr/>
+        </p:nvSpPr>
+        <p:spPr>
+          <a:xfrm>
+            <a:off x="7920304" y="91440"/>
+            <a:ext cx="3722751" cy="274320"/>
+          </a:xfrm>
+          <a:prstGeom prst="rect">
+            <a:avLst/>
+          </a:prstGeom>
+          <a:solidFill>
+            <a:srgbClr val="E0F2FE"/>
+          </a:solidFill>
+          <a:ln w="12700">
+            <a:solidFill>
+              <a:srgbClr val="0369A1"/>
+            </a:solidFill>
+            <a:prstDash val="solid"/>
+          </a:ln>
+        </p:spPr>
+      </p:sp>
+      <p:sp>
+        <p:nvSpPr>
+          <p:cNvPr id="15" name="Shape 13"/>
+          <p:cNvSpPr/>
+          <p:nvPr/>
+        </p:nvSpPr>
+        <p:spPr>
+          <a:xfrm>
+            <a:off x="7920304" y="91440"/>
+            <a:ext cx="73152" cy="274320"/>
+          </a:xfrm>
+          <a:prstGeom prst="rect">
+            <a:avLst/>
+          </a:prstGeom>
+          <a:solidFill>
+            <a:srgbClr val="0369A1"/>
+          </a:solidFill>
+          <a:ln w="12700">
+            <a:solidFill>
+              <a:srgbClr val="0369A1"/>
+            </a:solidFill>
+            <a:prstDash val="solid"/>
+          </a:ln>
+        </p:spPr>
+      </p:sp>
+      <p:pic>
+        <p:nvPicPr>
+          <p:cNvPr id="16" name="Image 0" descr="preencoded.png">    </p:cNvPr>
+          <p:cNvPicPr>
+            <a:picLocks noChangeAspect="1"/>
+          </p:cNvPicPr>
+          <p:nvPr/>
+        </p:nvPicPr>
+        <p:blipFill>
+          <a:blip r:embed="rId1"/>
+          <a:stretch>
+            <a:fillRect/>
+          </a:stretch>
+        </p:blipFill>
+        <p:spPr>
+          <a:xfrm>
+            <a:off x="8048320" y="128016"/>
+            <a:ext cx="201168" cy="201168"/>
+          </a:xfrm>
+          <a:prstGeom prst="rect">
+            <a:avLst/>
+          </a:prstGeom>
+        </p:spPr>
+      </p:pic>
+      <p:sp>
+        <p:nvSpPr>
+          <p:cNvPr id="17" name="Text 14"/>
+          <p:cNvSpPr txBox="1"/>
+          <p:nvPr/>
+        </p:nvSpPr>
+        <p:spPr>
+          <a:xfrm>
+            <a:off x="8304352" y="91440"/>
+            <a:ext cx="3302127" cy="274320"/>
+          </a:xfrm>
+          <a:prstGeom prst="rect">
+            <a:avLst/>
+          </a:prstGeom>
+          <a:noFill/>
+          <a:ln/>
+        </p:spPr>
+        <p:txBody>
+          <a:bodyPr wrap="square" lIns="0" tIns="0" rIns="0" bIns="0" rtlCol="0" anchor="ctr"/>
+          <a:lstStyle/>
+          <a:p>
+            <a:pPr indent="0" marL="0">
+              <a:buNone/>
+            </a:pPr>
+            <a:r>
+              <a:rPr lang="en-US" sz="1100" b="1" dirty="0">
+                <a:solidFill>
+                  <a:srgbClr val="075985"/>
+                </a:solidFill>
+                <a:latin typeface="Calibri" pitchFamily="34" charset="0"/>
+                <a:ea typeface="Calibri" pitchFamily="34" charset="-122"/>
+                <a:cs typeface="Calibri" pitchFamily="34" charset="-120"/>
+              </a:rPr>
+              <a:t>DA COMPRENDERE OGGI</a:t>
+            </a:r>
+            <a:pPr indent="0" marL="0">
+              <a:buNone/>
+            </a:pPr>
+            <a:r>
+              <a:rPr lang="en-US" sz="1100" dirty="0">
+                <a:solidFill>
+                  <a:srgbClr val="075985"/>
+                </a:solidFill>
+                <a:latin typeface="Calibri" pitchFamily="34" charset="0"/>
+                <a:ea typeface="Calibri" pitchFamily="34" charset="-122"/>
+                <a:cs typeface="Calibri" pitchFamily="34" charset="-120"/>
+              </a:rPr>
+              <a:t> · caratteri e stringhe</a:t>
+            </a:r>
+            <a:endParaRPr lang="en-US" sz="1100" dirty="0"/>
+          </a:p>
+        </p:txBody>
+      </p:sp>
+      <p:sp>
+        <p:nvSpPr>
           <p:cNvPr id="25" name="Slide Number Placeholder 0"/>
           <p:cNvSpPr>
             <a:spLocks noGrp="1"/>
@@ -36432,6 +40047,133 @@
       </p:sp>
       <p:sp>
         <p:nvSpPr>
+          <p:cNvPr id="14" name="Shape 12"/>
+          <p:cNvSpPr/>
+          <p:nvPr/>
+        </p:nvSpPr>
+        <p:spPr>
+          <a:xfrm>
+            <a:off x="8182940" y="91440"/>
+            <a:ext cx="3460115" cy="274320"/>
+          </a:xfrm>
+          <a:prstGeom prst="rect">
+            <a:avLst/>
+          </a:prstGeom>
+          <a:solidFill>
+            <a:srgbClr val="E0F2FE"/>
+          </a:solidFill>
+          <a:ln w="12700">
+            <a:solidFill>
+              <a:srgbClr val="0369A1"/>
+            </a:solidFill>
+            <a:prstDash val="solid"/>
+          </a:ln>
+        </p:spPr>
+      </p:sp>
+      <p:sp>
+        <p:nvSpPr>
+          <p:cNvPr id="15" name="Shape 13"/>
+          <p:cNvSpPr/>
+          <p:nvPr/>
+        </p:nvSpPr>
+        <p:spPr>
+          <a:xfrm>
+            <a:off x="8182940" y="91440"/>
+            <a:ext cx="73152" cy="274320"/>
+          </a:xfrm>
+          <a:prstGeom prst="rect">
+            <a:avLst/>
+          </a:prstGeom>
+          <a:solidFill>
+            <a:srgbClr val="0369A1"/>
+          </a:solidFill>
+          <a:ln w="12700">
+            <a:solidFill>
+              <a:srgbClr val="0369A1"/>
+            </a:solidFill>
+            <a:prstDash val="solid"/>
+          </a:ln>
+        </p:spPr>
+      </p:sp>
+      <p:pic>
+        <p:nvPicPr>
+          <p:cNvPr id="16" name="Image 0" descr="preencoded.png">    </p:cNvPr>
+          <p:cNvPicPr>
+            <a:picLocks noChangeAspect="1"/>
+          </p:cNvPicPr>
+          <p:nvPr/>
+        </p:nvPicPr>
+        <p:blipFill>
+          <a:blip r:embed="rId1"/>
+          <a:stretch>
+            <a:fillRect/>
+          </a:stretch>
+        </p:blipFill>
+        <p:spPr>
+          <a:xfrm>
+            <a:off x="8310956" y="128016"/>
+            <a:ext cx="201168" cy="201168"/>
+          </a:xfrm>
+          <a:prstGeom prst="rect">
+            <a:avLst/>
+          </a:prstGeom>
+        </p:spPr>
+      </p:pic>
+      <p:sp>
+        <p:nvSpPr>
+          <p:cNvPr id="17" name="Text 14"/>
+          <p:cNvSpPr txBox="1"/>
+          <p:nvPr/>
+        </p:nvSpPr>
+        <p:spPr>
+          <a:xfrm>
+            <a:off x="8566988" y="91440"/>
+            <a:ext cx="3039491" cy="274320"/>
+          </a:xfrm>
+          <a:prstGeom prst="rect">
+            <a:avLst/>
+          </a:prstGeom>
+          <a:noFill/>
+          <a:ln/>
+        </p:spPr>
+        <p:txBody>
+          <a:bodyPr wrap="square" lIns="0" tIns="0" rIns="0" bIns="0" rtlCol="0" anchor="ctr"/>
+          <a:lstStyle/>
+          <a:p>
+            <a:pPr indent="0" marL="0">
+              <a:buNone/>
+            </a:pPr>
+            <a:r>
+              <a:rPr lang="en-US" sz="1100" b="1" dirty="0">
+                <a:solidFill>
+                  <a:srgbClr val="075985"/>
+                </a:solidFill>
+                <a:latin typeface="Calibri" pitchFamily="34" charset="0"/>
+                <a:ea typeface="Calibri" pitchFamily="34" charset="-122"/>
+                <a:cs typeface="Calibri" pitchFamily="34" charset="-120"/>
+              </a:rPr>
+              <a:t>DA COMPRENDERE OGGI</a:t>
+            </a:r>
+            <a:pPr indent="0" marL="0">
+              <a:buNone/>
+            </a:pPr>
+            <a:r>
+              <a:rPr lang="en-US" sz="1100" dirty="0">
+                <a:solidFill>
+                  <a:srgbClr val="075985"/>
+                </a:solidFill>
+                <a:latin typeface="Calibri" pitchFamily="34" charset="0"/>
+                <a:ea typeface="Calibri" pitchFamily="34" charset="-122"/>
+                <a:cs typeface="Calibri" pitchFamily="34" charset="-120"/>
+              </a:rPr>
+              <a:t> · la virgola fissa</a:t>
+            </a:r>
+            <a:endParaRPr lang="en-US" sz="1100" dirty="0"/>
+          </a:p>
+        </p:txBody>
+      </p:sp>
+      <p:sp>
+        <p:nvSpPr>
           <p:cNvPr id="25" name="Slide Number Placeholder 0"/>
           <p:cNvSpPr>
             <a:spLocks noGrp="1"/>
@@ -37452,6 +41194,133 @@
               <a:t>Il limite si raggiunge a 16 punti</a:t>
             </a:r>
             <a:endParaRPr lang="en-US" sz="1200" dirty="0"/>
+          </a:p>
+        </p:txBody>
+      </p:sp>
+      <p:sp>
+        <p:nvSpPr>
+          <p:cNvPr id="17" name="Shape 15"/>
+          <p:cNvSpPr/>
+          <p:nvPr/>
+        </p:nvSpPr>
+        <p:spPr>
+          <a:xfrm>
+            <a:off x="8182940" y="91440"/>
+            <a:ext cx="3460115" cy="274320"/>
+          </a:xfrm>
+          <a:prstGeom prst="rect">
+            <a:avLst/>
+          </a:prstGeom>
+          <a:solidFill>
+            <a:srgbClr val="E0F2FE"/>
+          </a:solidFill>
+          <a:ln w="12700">
+            <a:solidFill>
+              <a:srgbClr val="0369A1"/>
+            </a:solidFill>
+            <a:prstDash val="solid"/>
+          </a:ln>
+        </p:spPr>
+      </p:sp>
+      <p:sp>
+        <p:nvSpPr>
+          <p:cNvPr id="18" name="Shape 16"/>
+          <p:cNvSpPr/>
+          <p:nvPr/>
+        </p:nvSpPr>
+        <p:spPr>
+          <a:xfrm>
+            <a:off x="8182940" y="91440"/>
+            <a:ext cx="73152" cy="274320"/>
+          </a:xfrm>
+          <a:prstGeom prst="rect">
+            <a:avLst/>
+          </a:prstGeom>
+          <a:solidFill>
+            <a:srgbClr val="0369A1"/>
+          </a:solidFill>
+          <a:ln w="12700">
+            <a:solidFill>
+              <a:srgbClr val="0369A1"/>
+            </a:solidFill>
+            <a:prstDash val="solid"/>
+          </a:ln>
+        </p:spPr>
+      </p:sp>
+      <p:pic>
+        <p:nvPicPr>
+          <p:cNvPr id="19" name="Image 0" descr="preencoded.png">    </p:cNvPr>
+          <p:cNvPicPr>
+            <a:picLocks noChangeAspect="1"/>
+          </p:cNvPicPr>
+          <p:nvPr/>
+        </p:nvPicPr>
+        <p:blipFill>
+          <a:blip r:embed="rId1"/>
+          <a:stretch>
+            <a:fillRect/>
+          </a:stretch>
+        </p:blipFill>
+        <p:spPr>
+          <a:xfrm>
+            <a:off x="8310956" y="128016"/>
+            <a:ext cx="201168" cy="201168"/>
+          </a:xfrm>
+          <a:prstGeom prst="rect">
+            <a:avLst/>
+          </a:prstGeom>
+        </p:spPr>
+      </p:pic>
+      <p:sp>
+        <p:nvSpPr>
+          <p:cNvPr id="20" name="Text 17"/>
+          <p:cNvSpPr txBox="1"/>
+          <p:nvPr/>
+        </p:nvSpPr>
+        <p:spPr>
+          <a:xfrm>
+            <a:off x="8566988" y="91440"/>
+            <a:ext cx="3039491" cy="274320"/>
+          </a:xfrm>
+          <a:prstGeom prst="rect">
+            <a:avLst/>
+          </a:prstGeom>
+          <a:noFill/>
+          <a:ln/>
+        </p:spPr>
+        <p:txBody>
+          <a:bodyPr wrap="square" lIns="0" tIns="0" rIns="0" bIns="0" rtlCol="0" anchor="ctr"/>
+          <a:lstStyle/>
+          <a:p>
+            <a:pPr indent="0" marL="0">
+              <a:buNone/>
+            </a:pPr>
+            <a:r>
+              <a:rPr lang="en-US" sz="1100" b="1" dirty="0">
+                <a:solidFill>
+                  <a:srgbClr val="075985"/>
+                </a:solidFill>
+                <a:latin typeface="Calibri" pitchFamily="34" charset="0"/>
+                <a:ea typeface="Calibri" pitchFamily="34" charset="-122"/>
+                <a:cs typeface="Calibri" pitchFamily="34" charset="-120"/>
+              </a:rPr>
+              <a:t>DA COMPRENDERE OGGI</a:t>
+            </a:r>
+            <a:pPr indent="0" marL="0">
+              <a:buNone/>
+            </a:pPr>
+            <a:r>
+              <a:rPr lang="en-US" sz="1100" dirty="0">
+                <a:solidFill>
+                  <a:srgbClr val="075985"/>
+                </a:solidFill>
+                <a:latin typeface="Calibri" pitchFamily="34" charset="0"/>
+                <a:ea typeface="Calibri" pitchFamily="34" charset="-122"/>
+                <a:cs typeface="Calibri" pitchFamily="34" charset="-120"/>
+              </a:rPr>
+              <a:t> · la virgola fissa</a:t>
+            </a:r>
+            <a:endParaRPr lang="en-US" sz="1100" dirty="0"/>
           </a:p>
         </p:txBody>
       </p:sp>

--- a/it/slides/22-Architettura_dei_Calcolatori-Verm1_Parte_4-Codice.pptx
+++ b/it/slides/22-Architettura_dei_Calcolatori-Verm1_Parte_4-Codice.pptx
@@ -150,18 +150,18 @@
   <p:extLst>
     <p:ext uri="{521415D9-36F7-43E2-AB2F-B90AF26B5E84}">
       <p14:sectionLst xmlns:p14="http://schemas.microsoft.com/office/powerpoint/2010/main">
-        <p14:section name="Apertura" id="{e257501e-6bcd-447c-f753-57e7e6e27fb5}">
+        <p14:section name="Apertura" id="{864976c0-4d81-d11a-f72a-c9e5f57b52ad}">
           <p14:sldIdLst>
             <p14:sldId id="256"/>
             <p14:sldId id="257"/>
           </p14:sldIdLst>
         </p14:section>
-        <p14:section name="I listati" id="{14e51238-341b-98d6-f97c-0ffe11f0f055}">
+        <p14:section name="I listati" id="{b52220ab-0bf3-5fa2-33f9-c7882e84d25e}">
           <p14:sldIdLst>
             <p14:sldId id="258"/>
           </p14:sldIdLst>
         </p14:section>
-        <p14:section name="Passo 1: il punteggio in cifre" id="{3f57570e-1570-1954-93d8-598b806ebb0b}">
+        <p14:section name="Passo 1: il punteggio in cifre" id="{6d58f13d-ee12-1580-06e2-150b9350e5d3}">
           <p14:sldIdLst>
             <p14:sldId id="259"/>
             <p14:sldId id="260"/>
@@ -169,14 +169,14 @@
             <p14:sldId id="262"/>
           </p14:sldIdLst>
         </p14:section>
-        <p14:section name="Passo 2: i livelli" id="{bbd4accc-ac24-6088-577d-192d2e4e85f4}">
+        <p14:section name="Passo 2: i livelli" id="{090b3589-b58a-2164-64ae-84146e296f96}">
           <p14:sldIdLst>
             <p14:sldId id="263"/>
             <p14:sldId id="264"/>
             <p14:sldId id="265"/>
           </p14:sldIdLst>
         </p14:section>
-        <p14:section name="Passo 3: step dice che cosa ha cambiato" id="{e06a041e-9acb-e4bc-104f-a055d5a4106f}">
+        <p14:section name="Passo 3: step dice che cosa ha cambiato" id="{f50ec194-7dc6-c425-cc0a-d8663b1895f0}">
           <p14:sldIdLst>
             <p14:sldId id="266"/>
             <p14:sldId id="267"/>
@@ -188,7 +188,7 @@
             <p14:sldId id="273"/>
           </p14:sldIdLst>
         </p14:section>
-        <p14:section name="Passo 4: disegnare solo ciò che è cambiato" id="{c7c207cd-6c1a-d67f-db37-2412d3f007ee}">
+        <p14:section name="Passo 4: disegnare solo ciò che è cambiato" id="{473fc78b-0879-ac65-2d5a-a30770076a49}">
           <p14:sldIdLst>
             <p14:sldId id="274"/>
             <p14:sldId id="275"/>
@@ -203,7 +203,7 @@
             <p14:sldId id="284"/>
           </p14:sldIdLst>
         </p14:section>
-        <p14:section name="Passo 5: misurare" id="{dca8dc34-afdf-216e-7720-5ff53a3689c1}">
+        <p14:section name="Passo 5: misurare" id="{e1abfd15-90ab-9262-7297-a270a0c5493b}">
           <p14:sldIdLst>
             <p14:sldId id="285"/>
             <p14:sldId id="286"/>
@@ -216,7 +216,7 @@
             <p14:sldId id="293"/>
           </p14:sldIdLst>
         </p14:section>
-        <p14:section name="Eseguire e provare" id="{291b7b1c-6654-1146-39dd-9d086bcecfab}">
+        <p14:section name="Eseguire e provare" id="{f99a9d7a-b0c7-9022-5ae8-a2cac2270867}">
           <p14:sldIdLst>
             <p14:sldId id="294"/>
             <p14:sldId id="295"/>
@@ -225,7 +225,7 @@
             <p14:sldId id="298"/>
           </p14:sldIdLst>
         </p14:section>
-        <p14:section name="Esercizi" id="{ff36453c-7b2e-b94c-49f0-00d89d6b0c91}">
+        <p14:section name="Esercizi" id="{8a3b80ca-1a4a-8576-5488-aed856eb2785}">
           <p14:sldIdLst>
             <p14:sldId id="299"/>
           </p14:sldIdLst>
